--- a/lab2/lab2.pptx
+++ b/lab2/lab2.pptx
@@ -5,26 +5,27 @@
     <p:sldMasterId id="2147483648" r:id="rId1"/>
   </p:sldMasterIdLst>
   <p:notesMasterIdLst>
-    <p:notesMasterId r:id="rId19"/>
+    <p:notesMasterId r:id="rId20"/>
   </p:notesMasterIdLst>
   <p:sldIdLst>
     <p:sldId id="256" r:id="rId2"/>
-    <p:sldId id="276" r:id="rId3"/>
+    <p:sldId id="285" r:id="rId3"/>
     <p:sldId id="283" r:id="rId4"/>
-    <p:sldId id="258" r:id="rId5"/>
+    <p:sldId id="276" r:id="rId5"/>
     <p:sldId id="284" r:id="rId6"/>
-    <p:sldId id="261" r:id="rId7"/>
+    <p:sldId id="258" r:id="rId7"/>
     <p:sldId id="277" r:id="rId8"/>
-    <p:sldId id="262" r:id="rId9"/>
+    <p:sldId id="261" r:id="rId9"/>
     <p:sldId id="278" r:id="rId10"/>
-    <p:sldId id="263" r:id="rId11"/>
+    <p:sldId id="262" r:id="rId11"/>
     <p:sldId id="279" r:id="rId12"/>
-    <p:sldId id="264" r:id="rId13"/>
+    <p:sldId id="263" r:id="rId13"/>
     <p:sldId id="280" r:id="rId14"/>
-    <p:sldId id="274" r:id="rId15"/>
-    <p:sldId id="281" r:id="rId16"/>
-    <p:sldId id="282" r:id="rId17"/>
-    <p:sldId id="275" r:id="rId18"/>
+    <p:sldId id="264" r:id="rId15"/>
+    <p:sldId id="274" r:id="rId16"/>
+    <p:sldId id="281" r:id="rId17"/>
+    <p:sldId id="282" r:id="rId18"/>
+    <p:sldId id="275" r:id="rId19"/>
   </p:sldIdLst>
   <p:sldSz cx="12192000" cy="6858000"/>
   <p:notesSz cx="6858000" cy="9144000"/>
@@ -3903,10 +3904,10 @@
       </p:grpSpPr>
       <p:sp>
         <p:nvSpPr>
-          <p:cNvPr id="20" name="TextBox 19">
-            <a:extLst>
-              <a:ext uri="{FF2B5EF4-FFF2-40B4-BE49-F238E27FC236}">
-                <a16:creationId xmlns:a16="http://schemas.microsoft.com/office/drawing/2014/main" id="{71F5B869-FCA3-91D3-678D-F5E5BE3D9772}"/>
+          <p:cNvPr id="5" name="TextBox 4">
+            <a:extLst>
+              <a:ext uri="{FF2B5EF4-FFF2-40B4-BE49-F238E27FC236}">
+                <a16:creationId xmlns:a16="http://schemas.microsoft.com/office/drawing/2014/main" id="{B41B6E55-C1E7-22C7-FFCB-604BB72C480D}"/>
               </a:ext>
             </a:extLst>
           </p:cNvPr>
@@ -3915,8 +3916,8 @@
         </p:nvSpPr>
         <p:spPr>
           <a:xfrm>
-            <a:off x="1489610" y="1747042"/>
-            <a:ext cx="9212779" cy="707886"/>
+            <a:off x="1482190" y="549275"/>
+            <a:ext cx="9185810" cy="954107"/>
           </a:xfrm>
           <a:prstGeom prst="rect">
             <a:avLst/>
@@ -3930,8 +3931,10 @@
           <a:lstStyle/>
           <a:p>
             <a:r>
-              <a:rPr lang="ru-RU" sz="2000" dirty="0"/>
-              <a:t>Суть задания: Найти строки с пикселями выше порога в горизонтальной проекции бинарного изображения.		</a:t>
+              <a:rPr lang="ru-RU" sz="2800" b="1" dirty="0">
+                <a:latin typeface="+mj-lt"/>
+              </a:rPr>
+              <a:t>Задание 3. Интегральные проекции цветного изображения</a:t>
             </a:r>
           </a:p>
         </p:txBody>
@@ -3950,8 +3953,8 @@
         </p:nvSpPr>
         <p:spPr>
           <a:xfrm>
-            <a:off x="4009892" y="2748518"/>
-            <a:ext cx="4172215" cy="369332"/>
+            <a:off x="3491513" y="4089955"/>
+            <a:ext cx="4173803" cy="369332"/>
           </a:xfrm>
           <a:prstGeom prst="rect">
             <a:avLst/>
@@ -3974,10 +3977,10 @@
       </p:sp>
       <p:sp>
         <p:nvSpPr>
-          <p:cNvPr id="4" name="TextBox 3">
-            <a:extLst>
-              <a:ext uri="{FF2B5EF4-FFF2-40B4-BE49-F238E27FC236}">
-                <a16:creationId xmlns:a16="http://schemas.microsoft.com/office/drawing/2014/main" id="{32A0700A-D1A3-CABA-8257-0049F29CEB91}"/>
+          <p:cNvPr id="12" name="TextBox 11">
+            <a:extLst>
+              <a:ext uri="{FF2B5EF4-FFF2-40B4-BE49-F238E27FC236}">
+                <a16:creationId xmlns:a16="http://schemas.microsoft.com/office/drawing/2014/main" id="{5E081176-D1EE-00B4-D512-DF4558557F77}"/>
               </a:ext>
             </a:extLst>
           </p:cNvPr>
@@ -3986,8 +3989,8 @@
         </p:nvSpPr>
         <p:spPr>
           <a:xfrm>
-            <a:off x="1482190" y="764718"/>
-            <a:ext cx="9185810" cy="523220"/>
+            <a:off x="1489610" y="1747042"/>
+            <a:ext cx="9212779" cy="707886"/>
           </a:xfrm>
           <a:prstGeom prst="rect">
             <a:avLst/>
@@ -4001,20 +4004,18 @@
           <a:lstStyle/>
           <a:p>
             <a:r>
-              <a:rPr lang="ru-RU" sz="2800" b="1" dirty="0">
-                <a:latin typeface="+mj-lt"/>
-              </a:rPr>
-              <a:t>Задание 4. Поиск значимых строк бинарного кадра</a:t>
-            </a:r>
-          </a:p>
-        </p:txBody>
-      </p:sp>
-      <p:sp>
-        <p:nvSpPr>
-          <p:cNvPr id="6" name="Номер слайда 5">
-            <a:extLst>
-              <a:ext uri="{FF2B5EF4-FFF2-40B4-BE49-F238E27FC236}">
-                <a16:creationId xmlns:a16="http://schemas.microsoft.com/office/drawing/2014/main" id="{06D7BD2D-450B-9072-1CC3-235F616A2D19}"/>
+              <a:rPr lang="ru-RU" sz="2000" dirty="0"/>
+              <a:t>Суть задания: Построить горизонтальную и вертикальную проекции цветного изображения (суммируя по каналам).</a:t>
+            </a:r>
+          </a:p>
+        </p:txBody>
+      </p:sp>
+      <p:sp>
+        <p:nvSpPr>
+          <p:cNvPr id="14" name="Номер слайда 13">
+            <a:extLst>
+              <a:ext uri="{FF2B5EF4-FFF2-40B4-BE49-F238E27FC236}">
+                <a16:creationId xmlns:a16="http://schemas.microsoft.com/office/drawing/2014/main" id="{684D501B-E133-D9A8-6B7A-D563CF6B5219}"/>
               </a:ext>
             </a:extLst>
           </p:cNvPr>
@@ -4030,19 +4031,20 @@
           <a:bodyPr/>
           <a:lstStyle/>
           <a:p>
-            <a:r>
-              <a:rPr lang="ru-RU" dirty="0"/>
-              <a:t>4</a:t>
-            </a:r>
+            <a:fld id="{89A371D6-626E-4711-87E0-599E0F8A4C97}" type="slidenum">
+              <a:rPr lang="ru-RU" smtClean="0"/>
+              <a:t>10</a:t>
+            </a:fld>
+            <a:endParaRPr lang="ru-RU"/>
           </a:p>
         </p:txBody>
       </p:sp>
       <p:pic>
         <p:nvPicPr>
-          <p:cNvPr id="3" name="Рисунок 2">
-            <a:extLst>
-              <a:ext uri="{FF2B5EF4-FFF2-40B4-BE49-F238E27FC236}">
-                <a16:creationId xmlns:a16="http://schemas.microsoft.com/office/drawing/2014/main" id="{87BC3537-6377-59E9-4C4F-C4A540AAF3CC}"/>
+          <p:cNvPr id="4" name="Рисунок 3">
+            <a:extLst>
+              <a:ext uri="{FF2B5EF4-FFF2-40B4-BE49-F238E27FC236}">
+                <a16:creationId xmlns:a16="http://schemas.microsoft.com/office/drawing/2014/main" id="{9D5D7368-5656-7936-E8AB-C3EDD6992D22}"/>
               </a:ext>
             </a:extLst>
           </p:cNvPr>
@@ -4059,38 +4061,8 @@
         </p:blipFill>
         <p:spPr>
           <a:xfrm>
-            <a:off x="501051" y="3117850"/>
-            <a:ext cx="5410200" cy="3238500"/>
-          </a:xfrm>
-          <a:prstGeom prst="rect">
-            <a:avLst/>
-          </a:prstGeom>
-        </p:spPr>
-      </p:pic>
-      <p:pic>
-        <p:nvPicPr>
-          <p:cNvPr id="8" name="Рисунок 7">
-            <a:extLst>
-              <a:ext uri="{FF2B5EF4-FFF2-40B4-BE49-F238E27FC236}">
-                <a16:creationId xmlns:a16="http://schemas.microsoft.com/office/drawing/2014/main" id="{16AD397E-B79F-9D56-982C-7FE44B402992}"/>
-              </a:ext>
-            </a:extLst>
-          </p:cNvPr>
-          <p:cNvPicPr>
-            <a:picLocks noChangeAspect="1"/>
-          </p:cNvPicPr>
-          <p:nvPr/>
-        </p:nvPicPr>
-        <p:blipFill>
-          <a:blip r:embed="rId3"/>
-          <a:stretch>
-            <a:fillRect/>
-          </a:stretch>
-        </p:blipFill>
-        <p:spPr>
-          <a:xfrm>
-            <a:off x="6753225" y="3117850"/>
-            <a:ext cx="4600575" cy="3238500"/>
+            <a:off x="7010400" y="2197100"/>
+            <a:ext cx="3657600" cy="4524375"/>
           </a:xfrm>
           <a:prstGeom prst="rect">
             <a:avLst/>
@@ -4100,25 +4072,13 @@
     </p:spTree>
     <p:extLst>
       <p:ext uri="{BB962C8B-B14F-4D97-AF65-F5344CB8AC3E}">
-        <p14:creationId xmlns:p14="http://schemas.microsoft.com/office/powerpoint/2010/main" val="2105614118"/>
+        <p14:creationId xmlns:p14="http://schemas.microsoft.com/office/powerpoint/2010/main" val="3690317432"/>
       </p:ext>
     </p:extLst>
   </p:cSld>
   <p:clrMapOvr>
     <a:masterClrMapping/>
   </p:clrMapOvr>
-  <mc:AlternateContent xmlns:mc="http://schemas.openxmlformats.org/markup-compatibility/2006" xmlns:p14="http://schemas.microsoft.com/office/powerpoint/2010/main">
-    <mc:Choice Requires="p14">
-      <p:transition spd="med" p14:dur="700">
-        <p:fade/>
-      </p:transition>
-    </mc:Choice>
-    <mc:Fallback xmlns="">
-      <p:transition spd="med">
-        <p:fade/>
-      </p:transition>
-    </mc:Fallback>
-  </mc:AlternateContent>
 </p:sld>
 </file>
 
@@ -4297,8 +4257,38 @@
         </p:blipFill>
         <p:spPr>
           <a:xfrm>
-            <a:off x="998270" y="3143250"/>
-            <a:ext cx="10153650" cy="3714750"/>
+            <a:off x="3051141" y="3252158"/>
+            <a:ext cx="8747760" cy="3200400"/>
+          </a:xfrm>
+          <a:prstGeom prst="rect">
+            <a:avLst/>
+          </a:prstGeom>
+        </p:spPr>
+      </p:pic>
+      <p:pic>
+        <p:nvPicPr>
+          <p:cNvPr id="9" name="Рисунок 8">
+            <a:extLst>
+              <a:ext uri="{FF2B5EF4-FFF2-40B4-BE49-F238E27FC236}">
+                <a16:creationId xmlns:a16="http://schemas.microsoft.com/office/drawing/2014/main" id="{17F3C5DF-D82D-E762-51CF-45DCADDF7E02}"/>
+              </a:ext>
+            </a:extLst>
+          </p:cNvPr>
+          <p:cNvPicPr>
+            <a:picLocks noChangeAspect="1"/>
+          </p:cNvPicPr>
+          <p:nvPr/>
+        </p:nvPicPr>
+        <p:blipFill>
+          <a:blip r:embed="rId3"/>
+          <a:stretch>
+            <a:fillRect/>
+          </a:stretch>
+        </p:blipFill>
+        <p:spPr>
+          <a:xfrm>
+            <a:off x="201378" y="3252158"/>
+            <a:ext cx="2849763" cy="2925354"/>
           </a:xfrm>
           <a:prstGeom prst="rect">
             <a:avLst/>
@@ -4315,18 +4305,6 @@
   <p:clrMapOvr>
     <a:masterClrMapping/>
   </p:clrMapOvr>
-  <mc:AlternateContent xmlns:mc="http://schemas.openxmlformats.org/markup-compatibility/2006" xmlns:p14="http://schemas.microsoft.com/office/powerpoint/2010/main">
-    <mc:Choice Requires="p14">
-      <p:transition spd="med" p14:dur="700">
-        <p:fade/>
-      </p:transition>
-    </mc:Choice>
-    <mc:Fallback xmlns="">
-      <p:transition spd="med">
-        <p:fade/>
-      </p:transition>
-    </mc:Fallback>
-  </mc:AlternateContent>
 </p:sld>
 </file>
 
@@ -4349,10 +4327,10 @@
       </p:grpSpPr>
       <p:sp>
         <p:nvSpPr>
-          <p:cNvPr id="21" name="TextBox 20">
-            <a:extLst>
-              <a:ext uri="{FF2B5EF4-FFF2-40B4-BE49-F238E27FC236}">
-                <a16:creationId xmlns:a16="http://schemas.microsoft.com/office/drawing/2014/main" id="{0C569071-A5F8-E7C9-1DC2-DF3EA9F88597}"/>
+          <p:cNvPr id="20" name="TextBox 19">
+            <a:extLst>
+              <a:ext uri="{FF2B5EF4-FFF2-40B4-BE49-F238E27FC236}">
+                <a16:creationId xmlns:a16="http://schemas.microsoft.com/office/drawing/2014/main" id="{71F5B869-FCA3-91D3-678D-F5E5BE3D9772}"/>
               </a:ext>
             </a:extLst>
           </p:cNvPr>
@@ -4361,8 +4339,8 @@
         </p:nvSpPr>
         <p:spPr>
           <a:xfrm>
-            <a:off x="4009891" y="2752128"/>
-            <a:ext cx="4172215" cy="369332"/>
+            <a:off x="1489610" y="1747042"/>
+            <a:ext cx="9212779" cy="707886"/>
           </a:xfrm>
           <a:prstGeom prst="rect">
             <a:avLst/>
@@ -4375,20 +4353,19 @@
           </a:bodyPr>
           <a:lstStyle/>
           <a:p>
-            <a:pPr algn="ctr"/>
-            <a:r>
-              <a:rPr lang="ru-RU" b="1" dirty="0"/>
-              <a:t>Код:</a:t>
-            </a:r>
-          </a:p>
-        </p:txBody>
-      </p:sp>
-      <p:sp>
-        <p:nvSpPr>
-          <p:cNvPr id="6" name="TextBox 5">
-            <a:extLst>
-              <a:ext uri="{FF2B5EF4-FFF2-40B4-BE49-F238E27FC236}">
-                <a16:creationId xmlns:a16="http://schemas.microsoft.com/office/drawing/2014/main" id="{21717830-3824-984A-0FE8-3764A8CCF5E4}"/>
+            <a:r>
+              <a:rPr lang="ru-RU" sz="2000" dirty="0"/>
+              <a:t>Суть задания: Найти строки с пикселями выше порога в горизонтальной проекции бинарного изображения.		</a:t>
+            </a:r>
+          </a:p>
+        </p:txBody>
+      </p:sp>
+      <p:sp>
+        <p:nvSpPr>
+          <p:cNvPr id="4" name="TextBox 3">
+            <a:extLst>
+              <a:ext uri="{FF2B5EF4-FFF2-40B4-BE49-F238E27FC236}">
+                <a16:creationId xmlns:a16="http://schemas.microsoft.com/office/drawing/2014/main" id="{32A0700A-D1A3-CABA-8257-0049F29CEB91}"/>
               </a:ext>
             </a:extLst>
           </p:cNvPr>
@@ -4415,52 +4392,17 @@
               <a:rPr lang="ru-RU" sz="2800" b="1" dirty="0">
                 <a:latin typeface="+mj-lt"/>
               </a:rPr>
-              <a:t>Задание 5. Поиск значимых столбцов бинарного кадра</a:t>
-            </a:r>
-          </a:p>
-        </p:txBody>
-      </p:sp>
-      <p:sp>
-        <p:nvSpPr>
-          <p:cNvPr id="8" name="TextBox 7">
-            <a:extLst>
-              <a:ext uri="{FF2B5EF4-FFF2-40B4-BE49-F238E27FC236}">
-                <a16:creationId xmlns:a16="http://schemas.microsoft.com/office/drawing/2014/main" id="{49F1F59B-B0EE-8AD8-BE35-7EF5C2451747}"/>
-              </a:ext>
-            </a:extLst>
-          </p:cNvPr>
-          <p:cNvSpPr txBox="1"/>
-          <p:nvPr/>
-        </p:nvSpPr>
-        <p:spPr>
-          <a:xfrm>
-            <a:off x="1489610" y="1747042"/>
-            <a:ext cx="9212779" cy="707886"/>
-          </a:xfrm>
-          <a:prstGeom prst="rect">
-            <a:avLst/>
-          </a:prstGeom>
-          <a:noFill/>
-        </p:spPr>
-        <p:txBody>
-          <a:bodyPr wrap="square" rtlCol="0" anchor="ctr">
-            <a:spAutoFit/>
-          </a:bodyPr>
-          <a:lstStyle/>
-          <a:p>
-            <a:r>
-              <a:rPr lang="ru-RU" sz="2000" dirty="0"/>
-              <a:t>Суть задания: Найти столбцы с пикселями выше порога в вертикальной проекции бинарного изображения.</a:t>
-            </a:r>
-          </a:p>
-        </p:txBody>
-      </p:sp>
-      <p:sp>
-        <p:nvSpPr>
-          <p:cNvPr id="9" name="Номер слайда 8">
-            <a:extLst>
-              <a:ext uri="{FF2B5EF4-FFF2-40B4-BE49-F238E27FC236}">
-                <a16:creationId xmlns:a16="http://schemas.microsoft.com/office/drawing/2014/main" id="{9F13964B-87DF-AA68-A2E5-441A8684E77F}"/>
+              <a:t>Задание 4. Поиск значимых строк бинарного кадра</a:t>
+            </a:r>
+          </a:p>
+        </p:txBody>
+      </p:sp>
+      <p:sp>
+        <p:nvSpPr>
+          <p:cNvPr id="6" name="Номер слайда 5">
+            <a:extLst>
+              <a:ext uri="{FF2B5EF4-FFF2-40B4-BE49-F238E27FC236}">
+                <a16:creationId xmlns:a16="http://schemas.microsoft.com/office/drawing/2014/main" id="{06D7BD2D-450B-9072-1CC3-235F616A2D19}"/>
               </a:ext>
             </a:extLst>
           </p:cNvPr>
@@ -4485,10 +4427,10 @@
       </p:sp>
       <p:pic>
         <p:nvPicPr>
-          <p:cNvPr id="4" name="Рисунок 3">
-            <a:extLst>
-              <a:ext uri="{FF2B5EF4-FFF2-40B4-BE49-F238E27FC236}">
-                <a16:creationId xmlns:a16="http://schemas.microsoft.com/office/drawing/2014/main" id="{AC9FF70C-76A5-0748-322E-4C1136A5EF5A}"/>
+          <p:cNvPr id="3" name="Рисунок 2">
+            <a:extLst>
+              <a:ext uri="{FF2B5EF4-FFF2-40B4-BE49-F238E27FC236}">
+                <a16:creationId xmlns:a16="http://schemas.microsoft.com/office/drawing/2014/main" id="{87BC3537-6377-59E9-4C4F-C4A540AAF3CC}"/>
               </a:ext>
             </a:extLst>
           </p:cNvPr>
@@ -4505,8 +4447,8 @@
         </p:blipFill>
         <p:spPr>
           <a:xfrm>
-            <a:off x="895978" y="3169107"/>
-            <a:ext cx="4810125" cy="2924175"/>
+            <a:off x="457918" y="2531253"/>
+            <a:ext cx="5410200" cy="3238500"/>
           </a:xfrm>
           <a:prstGeom prst="rect">
             <a:avLst/>
@@ -4515,10 +4457,10 @@
       </p:pic>
       <p:pic>
         <p:nvPicPr>
-          <p:cNvPr id="7" name="Рисунок 6">
-            <a:extLst>
-              <a:ext uri="{FF2B5EF4-FFF2-40B4-BE49-F238E27FC236}">
-                <a16:creationId xmlns:a16="http://schemas.microsoft.com/office/drawing/2014/main" id="{169192EF-42ED-F09F-73A4-1970B91FA281}"/>
+          <p:cNvPr id="10" name="Рисунок 9">
+            <a:extLst>
+              <a:ext uri="{FF2B5EF4-FFF2-40B4-BE49-F238E27FC236}">
+                <a16:creationId xmlns:a16="http://schemas.microsoft.com/office/drawing/2014/main" id="{48B78252-74E5-CF6F-F35F-27F20D4E6ADD}"/>
               </a:ext>
             </a:extLst>
           </p:cNvPr>
@@ -4535,8 +4477,38 @@
         </p:blipFill>
         <p:spPr>
           <a:xfrm>
-            <a:off x="6248400" y="3172920"/>
-            <a:ext cx="4724400" cy="2686050"/>
+            <a:off x="6214164" y="2531253"/>
+            <a:ext cx="4352925" cy="2667000"/>
+          </a:xfrm>
+          <a:prstGeom prst="rect">
+            <a:avLst/>
+          </a:prstGeom>
+        </p:spPr>
+      </p:pic>
+      <p:pic>
+        <p:nvPicPr>
+          <p:cNvPr id="12" name="Рисунок 11">
+            <a:extLst>
+              <a:ext uri="{FF2B5EF4-FFF2-40B4-BE49-F238E27FC236}">
+                <a16:creationId xmlns:a16="http://schemas.microsoft.com/office/drawing/2014/main" id="{0AA1FF56-34EE-391B-ECC3-2FB43FAFBA53}"/>
+              </a:ext>
+            </a:extLst>
+          </p:cNvPr>
+          <p:cNvPicPr>
+            <a:picLocks noChangeAspect="1"/>
+          </p:cNvPicPr>
+          <p:nvPr/>
+        </p:nvPicPr>
+        <p:blipFill>
+          <a:blip r:embed="rId4"/>
+          <a:stretch>
+            <a:fillRect/>
+          </a:stretch>
+        </p:blipFill>
+        <p:spPr>
+          <a:xfrm>
+            <a:off x="5954325" y="5317869"/>
+            <a:ext cx="6001651" cy="844222"/>
           </a:xfrm>
           <a:prstGeom prst="rect">
             <a:avLst/>
@@ -4546,25 +4518,13 @@
     </p:spTree>
     <p:extLst>
       <p:ext uri="{BB962C8B-B14F-4D97-AF65-F5344CB8AC3E}">
-        <p14:creationId xmlns:p14="http://schemas.microsoft.com/office/powerpoint/2010/main" val="3293065839"/>
+        <p14:creationId xmlns:p14="http://schemas.microsoft.com/office/powerpoint/2010/main" val="2105614118"/>
       </p:ext>
     </p:extLst>
   </p:cSld>
   <p:clrMapOvr>
     <a:masterClrMapping/>
   </p:clrMapOvr>
-  <mc:AlternateContent xmlns:mc="http://schemas.openxmlformats.org/markup-compatibility/2006" xmlns:p14="http://schemas.microsoft.com/office/powerpoint/2010/main">
-    <mc:Choice Requires="p14">
-      <p:transition spd="med" p14:dur="700">
-        <p:fade/>
-      </p:transition>
-    </mc:Choice>
-    <mc:Fallback xmlns="">
-      <p:transition spd="med">
-        <p:fade/>
-      </p:transition>
-    </mc:Fallback>
-  </mc:AlternateContent>
 </p:sld>
 </file>
 
@@ -4761,18 +4721,6 @@
   <p:clrMapOvr>
     <a:masterClrMapping/>
   </p:clrMapOvr>
-  <mc:AlternateContent xmlns:mc="http://schemas.openxmlformats.org/markup-compatibility/2006" xmlns:p14="http://schemas.microsoft.com/office/powerpoint/2010/main">
-    <mc:Choice Requires="p14">
-      <p:transition spd="med" p14:dur="700">
-        <p:fade/>
-      </p:transition>
-    </mc:Choice>
-    <mc:Fallback xmlns="">
-      <p:transition spd="med">
-        <p:fade/>
-      </p:transition>
-    </mc:Fallback>
-  </mc:AlternateContent>
 </p:sld>
 </file>
 
@@ -4795,10 +4743,10 @@
       </p:grpSpPr>
       <p:sp>
         <p:nvSpPr>
-          <p:cNvPr id="5" name="TextBox 4">
-            <a:extLst>
-              <a:ext uri="{FF2B5EF4-FFF2-40B4-BE49-F238E27FC236}">
-                <a16:creationId xmlns:a16="http://schemas.microsoft.com/office/drawing/2014/main" id="{B41B6E55-C1E7-22C7-FFCB-604BB72C480D}"/>
+          <p:cNvPr id="6" name="TextBox 5">
+            <a:extLst>
+              <a:ext uri="{FF2B5EF4-FFF2-40B4-BE49-F238E27FC236}">
+                <a16:creationId xmlns:a16="http://schemas.microsoft.com/office/drawing/2014/main" id="{21717830-3824-984A-0FE8-3764A8CCF5E4}"/>
               </a:ext>
             </a:extLst>
           </p:cNvPr>
@@ -4807,8 +4755,8 @@
         </p:nvSpPr>
         <p:spPr>
           <a:xfrm>
-            <a:off x="1478764" y="503478"/>
-            <a:ext cx="9182101" cy="766047"/>
+            <a:off x="1482190" y="764718"/>
+            <a:ext cx="9185810" cy="523220"/>
           </a:xfrm>
           <a:prstGeom prst="rect">
             <a:avLst/>
@@ -4825,17 +4773,17 @@
               <a:rPr lang="ru-RU" sz="2800" b="1" dirty="0">
                 <a:latin typeface="+mj-lt"/>
               </a:rPr>
-              <a:t>Контрольные вопросы</a:t>
-            </a:r>
-          </a:p>
-        </p:txBody>
-      </p:sp>
-      <p:sp>
-        <p:nvSpPr>
-          <p:cNvPr id="20" name="TextBox 19">
-            <a:extLst>
-              <a:ext uri="{FF2B5EF4-FFF2-40B4-BE49-F238E27FC236}">
-                <a16:creationId xmlns:a16="http://schemas.microsoft.com/office/drawing/2014/main" id="{71F5B869-FCA3-91D3-678D-F5E5BE3D9772}"/>
+              <a:t>Задание 5. Поиск значимых столбцов бинарного кадра</a:t>
+            </a:r>
+          </a:p>
+        </p:txBody>
+      </p:sp>
+      <p:sp>
+        <p:nvSpPr>
+          <p:cNvPr id="8" name="TextBox 7">
+            <a:extLst>
+              <a:ext uri="{FF2B5EF4-FFF2-40B4-BE49-F238E27FC236}">
+                <a16:creationId xmlns:a16="http://schemas.microsoft.com/office/drawing/2014/main" id="{49F1F59B-B0EE-8AD8-BE35-7EF5C2451747}"/>
               </a:ext>
             </a:extLst>
           </p:cNvPr>
@@ -4844,8 +4792,8 @@
         </p:nvSpPr>
         <p:spPr>
           <a:xfrm>
-            <a:off x="1487488" y="1109915"/>
-            <a:ext cx="9182106" cy="369332"/>
+            <a:off x="1489610" y="1747042"/>
+            <a:ext cx="9212779" cy="707886"/>
           </a:xfrm>
           <a:prstGeom prst="rect">
             <a:avLst/>
@@ -4858,378 +4806,135 @@
           </a:bodyPr>
           <a:lstStyle/>
           <a:p>
-            <a:pPr algn="just"/>
-            <a:r>
-              <a:rPr lang="ru-RU" b="1" dirty="0"/>
-              <a:t>1. Что такое гистограмма изображения и для чего она используется?</a:t>
-            </a:r>
-          </a:p>
-        </p:txBody>
-      </p:sp>
-      <p:sp>
-        <p:nvSpPr>
-          <p:cNvPr id="7" name="TextBox 6">
-            <a:extLst>
-              <a:ext uri="{FF2B5EF4-FFF2-40B4-BE49-F238E27FC236}">
-                <a16:creationId xmlns:a16="http://schemas.microsoft.com/office/drawing/2014/main" id="{D665E4DE-7D6B-49F6-7D70-49D3CC230020}"/>
-              </a:ext>
-            </a:extLst>
-          </p:cNvPr>
-          <p:cNvSpPr txBox="1"/>
+            <a:r>
+              <a:rPr lang="ru-RU" sz="2000" dirty="0"/>
+              <a:t>Суть задания: Найти столбцы с пикселями выше порога в вертикальной проекции бинарного изображения.</a:t>
+            </a:r>
+          </a:p>
+        </p:txBody>
+      </p:sp>
+      <p:sp>
+        <p:nvSpPr>
+          <p:cNvPr id="9" name="Номер слайда 8">
+            <a:extLst>
+              <a:ext uri="{FF2B5EF4-FFF2-40B4-BE49-F238E27FC236}">
+                <a16:creationId xmlns:a16="http://schemas.microsoft.com/office/drawing/2014/main" id="{9F13964B-87DF-AA68-A2E5-441A8684E77F}"/>
+              </a:ext>
+            </a:extLst>
+          </p:cNvPr>
+          <p:cNvSpPr>
+            <a:spLocks noGrp="1"/>
+          </p:cNvSpPr>
+          <p:nvPr>
+            <p:ph type="sldNum" sz="quarter" idx="12"/>
+          </p:nvPr>
+        </p:nvSpPr>
+        <p:spPr/>
+        <p:txBody>
+          <a:bodyPr/>
+          <a:lstStyle/>
+          <a:p>
+            <a:r>
+              <a:rPr lang="ru-RU" dirty="0"/>
+              <a:t>4</a:t>
+            </a:r>
+          </a:p>
+        </p:txBody>
+      </p:sp>
+      <p:pic>
+        <p:nvPicPr>
+          <p:cNvPr id="4" name="Рисунок 3">
+            <a:extLst>
+              <a:ext uri="{FF2B5EF4-FFF2-40B4-BE49-F238E27FC236}">
+                <a16:creationId xmlns:a16="http://schemas.microsoft.com/office/drawing/2014/main" id="{AC9FF70C-76A5-0748-322E-4C1136A5EF5A}"/>
+              </a:ext>
+            </a:extLst>
+          </p:cNvPr>
+          <p:cNvPicPr>
+            <a:picLocks noChangeAspect="1"/>
+          </p:cNvPicPr>
           <p:nvPr/>
-        </p:nvSpPr>
-        <p:spPr>
-          <a:xfrm>
-            <a:off x="1487488" y="1399970"/>
-            <a:ext cx="9173377" cy="1200329"/>
-          </a:xfrm>
-          <a:prstGeom prst="rect">
-            <a:avLst/>
-          </a:prstGeom>
-          <a:noFill/>
-        </p:spPr>
-        <p:txBody>
-          <a:bodyPr wrap="square" rtlCol="0" anchor="ctr">
-            <a:spAutoFit/>
-          </a:bodyPr>
-          <a:lstStyle/>
-          <a:p>
-            <a:r>
-              <a:rPr lang="ru-RU" b="1" dirty="0"/>
-              <a:t>Ответ: </a:t>
-            </a:r>
-            <a:r>
-              <a:rPr lang="ru-RU" dirty="0"/>
-              <a:t>Это график статистического распределения пикселей по уровням яркости (от 0 до 255). Она используется для оценки освещенности и контрастности кадра, выбора порогов сегментации (например, метода </a:t>
-            </a:r>
-            <a:r>
-              <a:rPr lang="ru-RU" dirty="0" err="1"/>
-              <a:t>Оцу</a:t>
-            </a:r>
-            <a:r>
-              <a:rPr lang="ru-RU" dirty="0"/>
-              <a:t>) и коррекции тонового баланса (</a:t>
-            </a:r>
-            <a:r>
-              <a:rPr lang="ru-RU" dirty="0" err="1"/>
-              <a:t>эквализации</a:t>
-            </a:r>
-            <a:r>
-              <a:rPr lang="ru-RU" dirty="0"/>
-              <a:t>).</a:t>
-            </a:r>
-            <a:endParaRPr lang="ru-RU" b="1" dirty="0"/>
-          </a:p>
-        </p:txBody>
-      </p:sp>
-      <p:sp>
-        <p:nvSpPr>
-          <p:cNvPr id="8" name="TextBox 7">
-            <a:extLst>
-              <a:ext uri="{FF2B5EF4-FFF2-40B4-BE49-F238E27FC236}">
-                <a16:creationId xmlns:a16="http://schemas.microsoft.com/office/drawing/2014/main" id="{22BCE2EF-1E4E-4104-5239-E6203734018B}"/>
-              </a:ext>
-            </a:extLst>
-          </p:cNvPr>
-          <p:cNvSpPr txBox="1"/>
+        </p:nvPicPr>
+        <p:blipFill>
+          <a:blip r:embed="rId2"/>
+          <a:stretch>
+            <a:fillRect/>
+          </a:stretch>
+        </p:blipFill>
+        <p:spPr>
+          <a:xfrm>
+            <a:off x="516416" y="2752128"/>
+            <a:ext cx="4810125" cy="2924175"/>
+          </a:xfrm>
+          <a:prstGeom prst="rect">
+            <a:avLst/>
+          </a:prstGeom>
+        </p:spPr>
+      </p:pic>
+      <p:pic>
+        <p:nvPicPr>
+          <p:cNvPr id="7" name="Рисунок 6">
+            <a:extLst>
+              <a:ext uri="{FF2B5EF4-FFF2-40B4-BE49-F238E27FC236}">
+                <a16:creationId xmlns:a16="http://schemas.microsoft.com/office/drawing/2014/main" id="{169192EF-42ED-F09F-73A4-1970B91FA281}"/>
+              </a:ext>
+            </a:extLst>
+          </p:cNvPr>
+          <p:cNvPicPr>
+            <a:picLocks noChangeAspect="1"/>
+          </p:cNvPicPr>
           <p:nvPr/>
-        </p:nvSpPr>
-        <p:spPr>
-          <a:xfrm>
-            <a:off x="1487488" y="2536432"/>
-            <a:ext cx="9182106" cy="369332"/>
-          </a:xfrm>
-          <a:prstGeom prst="rect">
-            <a:avLst/>
-          </a:prstGeom>
-          <a:noFill/>
-        </p:spPr>
-        <p:txBody>
-          <a:bodyPr wrap="square" rtlCol="0" anchor="ctr">
-            <a:spAutoFit/>
-          </a:bodyPr>
-          <a:lstStyle/>
-          <a:p>
-            <a:pPr algn="just"/>
-            <a:r>
-              <a:rPr lang="ru-RU" b="1" dirty="0"/>
-              <a:t>2. Чем отличается гистограмма цветного изображения от серого?</a:t>
-            </a:r>
-          </a:p>
-        </p:txBody>
-      </p:sp>
-      <p:sp>
-        <p:nvSpPr>
-          <p:cNvPr id="9" name="TextBox 8">
-            <a:extLst>
-              <a:ext uri="{FF2B5EF4-FFF2-40B4-BE49-F238E27FC236}">
-                <a16:creationId xmlns:a16="http://schemas.microsoft.com/office/drawing/2014/main" id="{1B6288AE-09CC-5A07-59ED-90CC972FC3F3}"/>
-              </a:ext>
-            </a:extLst>
-          </p:cNvPr>
-          <p:cNvSpPr txBox="1"/>
+        </p:nvPicPr>
+        <p:blipFill>
+          <a:blip r:embed="rId3"/>
+          <a:stretch>
+            <a:fillRect/>
+          </a:stretch>
+        </p:blipFill>
+        <p:spPr>
+          <a:xfrm>
+            <a:off x="6308785" y="2752128"/>
+            <a:ext cx="4724400" cy="2686050"/>
+          </a:xfrm>
+          <a:prstGeom prst="rect">
+            <a:avLst/>
+          </a:prstGeom>
+        </p:spPr>
+      </p:pic>
+      <p:pic>
+        <p:nvPicPr>
+          <p:cNvPr id="11" name="Рисунок 10">
+            <a:extLst>
+              <a:ext uri="{FF2B5EF4-FFF2-40B4-BE49-F238E27FC236}">
+                <a16:creationId xmlns:a16="http://schemas.microsoft.com/office/drawing/2014/main" id="{3AF52D7F-5530-F622-61EC-F340DB8663DA}"/>
+              </a:ext>
+            </a:extLst>
+          </p:cNvPr>
+          <p:cNvPicPr>
+            <a:picLocks noChangeAspect="1"/>
+          </p:cNvPicPr>
           <p:nvPr/>
-        </p:nvSpPr>
-        <p:spPr>
-          <a:xfrm>
-            <a:off x="1463646" y="2855227"/>
-            <a:ext cx="9182106" cy="923330"/>
-          </a:xfrm>
-          <a:prstGeom prst="rect">
-            <a:avLst/>
-          </a:prstGeom>
-          <a:noFill/>
-        </p:spPr>
-        <p:txBody>
-          <a:bodyPr wrap="square" rtlCol="0" anchor="ctr">
-            <a:spAutoFit/>
-          </a:bodyPr>
-          <a:lstStyle/>
-          <a:p>
-            <a:r>
-              <a:rPr lang="ru-RU" b="1" dirty="0"/>
-              <a:t>Ответ: </a:t>
-            </a:r>
-            <a:r>
-              <a:rPr lang="ru-RU" dirty="0"/>
-              <a:t>Для серого (полутонового) изображения строится одна гистограмма общей яркости. Для цветного изображения строятся три отдельные гистограммы по каждому каналу (R, G, B) либо трехмерная гистограмма цветовых сочетаний.</a:t>
-            </a:r>
-            <a:endParaRPr lang="ru-RU" b="1" dirty="0"/>
-          </a:p>
-        </p:txBody>
-      </p:sp>
-      <p:sp>
-        <p:nvSpPr>
-          <p:cNvPr id="11" name="TextBox 10">
-            <a:extLst>
-              <a:ext uri="{FF2B5EF4-FFF2-40B4-BE49-F238E27FC236}">
-                <a16:creationId xmlns:a16="http://schemas.microsoft.com/office/drawing/2014/main" id="{BF6A8668-D6E4-5A1C-E82D-453FBC4EA553}"/>
-              </a:ext>
-            </a:extLst>
-          </p:cNvPr>
-          <p:cNvSpPr txBox="1"/>
-          <p:nvPr/>
-        </p:nvSpPr>
-        <p:spPr>
-          <a:xfrm>
-            <a:off x="1489086" y="3799624"/>
-            <a:ext cx="9164648" cy="369332"/>
-          </a:xfrm>
-          <a:prstGeom prst="rect">
-            <a:avLst/>
-          </a:prstGeom>
-          <a:noFill/>
-        </p:spPr>
-        <p:txBody>
-          <a:bodyPr wrap="square" rtlCol="0" anchor="ctr">
-            <a:spAutoFit/>
-          </a:bodyPr>
-          <a:lstStyle/>
-          <a:p>
-            <a:pPr algn="just"/>
-            <a:r>
-              <a:rPr lang="ru-RU" b="1" dirty="0"/>
-              <a:t>3. Что такое профиль изображения?</a:t>
-            </a:r>
-          </a:p>
-        </p:txBody>
-      </p:sp>
-      <p:sp>
-        <p:nvSpPr>
-          <p:cNvPr id="13" name="TextBox 12">
-            <a:extLst>
-              <a:ext uri="{FF2B5EF4-FFF2-40B4-BE49-F238E27FC236}">
-                <a16:creationId xmlns:a16="http://schemas.microsoft.com/office/drawing/2014/main" id="{6A0D2500-A0A1-8B4C-1976-D68650FD4B24}"/>
-              </a:ext>
-            </a:extLst>
-          </p:cNvPr>
-          <p:cNvSpPr txBox="1"/>
-          <p:nvPr/>
-        </p:nvSpPr>
-        <p:spPr>
-          <a:xfrm>
-            <a:off x="1463646" y="4086275"/>
-            <a:ext cx="9182106" cy="923330"/>
-          </a:xfrm>
-          <a:prstGeom prst="rect">
-            <a:avLst/>
-          </a:prstGeom>
-          <a:noFill/>
-        </p:spPr>
-        <p:txBody>
-          <a:bodyPr wrap="square" rtlCol="0" anchor="ctr">
-            <a:spAutoFit/>
-          </a:bodyPr>
-          <a:lstStyle/>
-          <a:p>
-            <a:r>
-              <a:rPr lang="ru-RU" b="1" dirty="0"/>
-              <a:t>Ответ: </a:t>
-            </a:r>
-            <a:r>
-              <a:rPr lang="ru-RU" dirty="0"/>
-              <a:t>Это одномерный график изменения интенсивности (яркости) пикселей вдоль заданной линии: либо срез по одной конкретной строке/столбцу, либо усредненное значение яркости строк или столбцов всего изображения.</a:t>
-            </a:r>
-            <a:endParaRPr lang="ru-RU" b="1" dirty="0"/>
-          </a:p>
-        </p:txBody>
-      </p:sp>
-      <p:sp>
-        <p:nvSpPr>
-          <p:cNvPr id="15" name="Номер слайда 14">
-            <a:extLst>
-              <a:ext uri="{FF2B5EF4-FFF2-40B4-BE49-F238E27FC236}">
-                <a16:creationId xmlns:a16="http://schemas.microsoft.com/office/drawing/2014/main" id="{E5B656E7-25A9-3B44-9104-A4F257D11ED5}"/>
-              </a:ext>
-            </a:extLst>
-          </p:cNvPr>
-          <p:cNvSpPr>
-            <a:spLocks noGrp="1"/>
-          </p:cNvSpPr>
-          <p:nvPr>
-            <p:ph type="sldNum" sz="quarter" idx="12"/>
-          </p:nvPr>
-        </p:nvSpPr>
-        <p:spPr/>
-        <p:txBody>
-          <a:bodyPr/>
-          <a:lstStyle/>
-          <a:p>
-            <a:r>
-              <a:rPr lang="ru-RU" dirty="0"/>
-              <a:t>12</a:t>
-            </a:r>
-          </a:p>
-        </p:txBody>
-      </p:sp>
-      <p:sp>
-        <p:nvSpPr>
-          <p:cNvPr id="16" name="TextBox 15">
-            <a:extLst>
-              <a:ext uri="{FF2B5EF4-FFF2-40B4-BE49-F238E27FC236}">
-                <a16:creationId xmlns:a16="http://schemas.microsoft.com/office/drawing/2014/main" id="{9FCB03C1-0B76-2E08-203C-12C1A8C68811}"/>
-              </a:ext>
-            </a:extLst>
-          </p:cNvPr>
-          <p:cNvSpPr txBox="1"/>
-          <p:nvPr/>
-        </p:nvSpPr>
-        <p:spPr>
-          <a:xfrm>
-            <a:off x="1478762" y="4972560"/>
-            <a:ext cx="9182106" cy="369332"/>
-          </a:xfrm>
-          <a:prstGeom prst="rect">
-            <a:avLst/>
-          </a:prstGeom>
-          <a:noFill/>
-        </p:spPr>
-        <p:txBody>
-          <a:bodyPr wrap="square" rtlCol="0" anchor="ctr">
-            <a:spAutoFit/>
-          </a:bodyPr>
-          <a:lstStyle/>
-          <a:p>
-            <a:pPr algn="just"/>
-            <a:r>
-              <a:rPr lang="ru-RU" b="1" dirty="0"/>
-              <a:t>4. Как вычисляется горизонтальный и вертикальный профиль?</a:t>
-            </a:r>
-          </a:p>
-        </p:txBody>
-      </p:sp>
-      <p:sp>
-        <p:nvSpPr>
-          <p:cNvPr id="17" name="TextBox 16">
-            <a:extLst>
-              <a:ext uri="{FF2B5EF4-FFF2-40B4-BE49-F238E27FC236}">
-                <a16:creationId xmlns:a16="http://schemas.microsoft.com/office/drawing/2014/main" id="{794C8A30-3803-DF2B-B667-815A58C44D49}"/>
-              </a:ext>
-            </a:extLst>
-          </p:cNvPr>
-          <p:cNvSpPr txBox="1"/>
-          <p:nvPr/>
-        </p:nvSpPr>
-        <p:spPr>
-          <a:xfrm>
-            <a:off x="1485893" y="5274938"/>
-            <a:ext cx="9167841" cy="946293"/>
-          </a:xfrm>
-          <a:prstGeom prst="rect">
-            <a:avLst/>
-          </a:prstGeom>
-          <a:noFill/>
-        </p:spPr>
-        <p:txBody>
-          <a:bodyPr wrap="square" rtlCol="0" anchor="ctr">
-            <a:spAutoFit/>
-          </a:bodyPr>
-          <a:lstStyle/>
-          <a:p>
-            <a:r>
-              <a:rPr lang="ru-RU" b="1" dirty="0"/>
-              <a:t>Ответ: </a:t>
-            </a:r>
-            <a:r>
-              <a:rPr lang="ru-RU" dirty="0"/>
-              <a:t> вычисляется усреднением значений пикселей вдоль строк (в Python: </a:t>
-            </a:r>
-            <a:r>
-              <a:rPr lang="ru-RU" dirty="0" err="1"/>
-              <a:t>np.mean</a:t>
-            </a:r>
-            <a:r>
-              <a:rPr lang="ru-RU" dirty="0"/>
-              <a:t>(</a:t>
-            </a:r>
-            <a:r>
-              <a:rPr lang="ru-RU" dirty="0" err="1"/>
-              <a:t>img</a:t>
-            </a:r>
-            <a:r>
-              <a:rPr lang="ru-RU" dirty="0"/>
-              <a:t>, </a:t>
-            </a:r>
-            <a:r>
-              <a:rPr lang="ru-RU" dirty="0" err="1"/>
-              <a:t>axis</a:t>
-            </a:r>
-            <a:r>
-              <a:rPr lang="ru-RU" dirty="0"/>
-              <a:t>=1)), а вертикальный — усреднением вдоль столбцов (</a:t>
-            </a:r>
-            <a:r>
-              <a:rPr lang="ru-RU" dirty="0" err="1"/>
-              <a:t>np.mean</a:t>
-            </a:r>
-            <a:r>
-              <a:rPr lang="ru-RU" dirty="0"/>
-              <a:t>(</a:t>
-            </a:r>
-            <a:r>
-              <a:rPr lang="ru-RU" dirty="0" err="1"/>
-              <a:t>img</a:t>
-            </a:r>
-            <a:r>
-              <a:rPr lang="ru-RU" dirty="0"/>
-              <a:t>, </a:t>
-            </a:r>
-            <a:r>
-              <a:rPr lang="ru-RU" dirty="0" err="1"/>
-              <a:t>axis</a:t>
-            </a:r>
-            <a:r>
-              <a:rPr lang="ru-RU" dirty="0"/>
-              <a:t>=0)).</a:t>
-            </a:r>
-            <a:endParaRPr lang="ru-RU" b="1" dirty="0"/>
-          </a:p>
-        </p:txBody>
-      </p:sp>
+        </p:nvPicPr>
+        <p:blipFill>
+          <a:blip r:embed="rId4"/>
+          <a:stretch>
+            <a:fillRect/>
+          </a:stretch>
+        </p:blipFill>
+        <p:spPr>
+          <a:xfrm>
+            <a:off x="5737653" y="5543321"/>
+            <a:ext cx="5295532" cy="707886"/>
+          </a:xfrm>
+          <a:prstGeom prst="rect">
+            <a:avLst/>
+          </a:prstGeom>
+        </p:spPr>
+      </p:pic>
     </p:spTree>
     <p:extLst>
       <p:ext uri="{BB962C8B-B14F-4D97-AF65-F5344CB8AC3E}">
-        <p14:creationId xmlns:p14="http://schemas.microsoft.com/office/powerpoint/2010/main" val="560170823"/>
+        <p14:creationId xmlns:p14="http://schemas.microsoft.com/office/powerpoint/2010/main" val="3293065839"/>
       </p:ext>
     </p:extLst>
   </p:cSld>
@@ -5321,9 +5026,10 @@
           </a:bodyPr>
           <a:lstStyle/>
           <a:p>
+            <a:pPr algn="just"/>
             <a:r>
               <a:rPr lang="ru-RU" b="1" dirty="0"/>
-              <a:t>5. Что такое проекция изображения?</a:t>
+              <a:t>1. Что такое гистограмма изображения и для чего она используется?</a:t>
             </a:r>
           </a:p>
         </p:txBody>
@@ -5342,8 +5048,8 @@
         </p:nvSpPr>
         <p:spPr>
           <a:xfrm>
-            <a:off x="1463646" y="1482239"/>
-            <a:ext cx="9173377" cy="923330"/>
+            <a:off x="1487488" y="1399970"/>
+            <a:ext cx="9173377" cy="1200329"/>
           </a:xfrm>
           <a:prstGeom prst="rect">
             <a:avLst/>
@@ -5362,39 +5068,23 @@
             </a:r>
             <a:r>
               <a:rPr lang="ru-RU" dirty="0"/>
-              <a:t>Это одномерный сигнал, полученный путем суммирования (интегрирования) значений пикселей вдоль заданного направления: вдоль строк для горизонтальной проекции (</a:t>
+              <a:t>Это график статистического распределения пикселей по уровням яркости (от 0 до 255). Она используется для оценки освещенности и контрастности кадра, выбора порогов сегментации (например, метода </a:t>
             </a:r>
             <a:r>
               <a:rPr lang="ru-RU" dirty="0" err="1"/>
-              <a:t>np.sum</a:t>
+              <a:t>Оцу</a:t>
             </a:r>
             <a:r>
               <a:rPr lang="ru-RU" dirty="0"/>
-              <a:t>(</a:t>
+              <a:t>) и коррекции тонового баланса (</a:t>
             </a:r>
             <a:r>
               <a:rPr lang="ru-RU" dirty="0" err="1"/>
-              <a:t>axis</a:t>
+              <a:t>эквализации</a:t>
             </a:r>
             <a:r>
               <a:rPr lang="ru-RU" dirty="0"/>
-              <a:t>=1)) или вдоль столбцов для вертикальной (</a:t>
-            </a:r>
-            <a:r>
-              <a:rPr lang="ru-RU" dirty="0" err="1"/>
-              <a:t>np.sum</a:t>
-            </a:r>
-            <a:r>
-              <a:rPr lang="ru-RU" dirty="0"/>
-              <a:t>(</a:t>
-            </a:r>
-            <a:r>
-              <a:rPr lang="ru-RU" dirty="0" err="1"/>
-              <a:t>axis</a:t>
-            </a:r>
-            <a:r>
-              <a:rPr lang="ru-RU" dirty="0"/>
-              <a:t>=0)).</a:t>
+              <a:t>).</a:t>
             </a:r>
             <a:endParaRPr lang="ru-RU" b="1" dirty="0"/>
           </a:p>
@@ -5414,7 +5104,7 @@
         </p:nvSpPr>
         <p:spPr>
           <a:xfrm>
-            <a:off x="1463646" y="2394463"/>
+            <a:off x="1487488" y="2536432"/>
             <a:ext cx="9182106" cy="369332"/>
           </a:xfrm>
           <a:prstGeom prst="rect">
@@ -5428,19 +5118,20 @@
           </a:bodyPr>
           <a:lstStyle/>
           <a:p>
+            <a:pPr algn="just"/>
             <a:r>
               <a:rPr lang="ru-RU" b="1" dirty="0"/>
-              <a:t>6. В чём разница между профилем и проекцией изображения?</a:t>
-            </a:r>
-          </a:p>
-        </p:txBody>
-      </p:sp>
-      <p:sp>
-        <p:nvSpPr>
-          <p:cNvPr id="11" name="TextBox 10">
-            <a:extLst>
-              <a:ext uri="{FF2B5EF4-FFF2-40B4-BE49-F238E27FC236}">
-                <a16:creationId xmlns:a16="http://schemas.microsoft.com/office/drawing/2014/main" id="{BF6A8668-D6E4-5A1C-E82D-453FBC4EA553}"/>
+              <a:t>2. Чем отличается гистограмма цветного изображения от серого?</a:t>
+            </a:r>
+          </a:p>
+        </p:txBody>
+      </p:sp>
+      <p:sp>
+        <p:nvSpPr>
+          <p:cNvPr id="9" name="TextBox 8">
+            <a:extLst>
+              <a:ext uri="{FF2B5EF4-FFF2-40B4-BE49-F238E27FC236}">
+                <a16:creationId xmlns:a16="http://schemas.microsoft.com/office/drawing/2014/main" id="{1B6288AE-09CC-5A07-59ED-90CC972FC3F3}"/>
               </a:ext>
             </a:extLst>
           </p:cNvPr>
@@ -5449,8 +5140,8 @@
         </p:nvSpPr>
         <p:spPr>
           <a:xfrm>
-            <a:off x="1487490" y="3842245"/>
-            <a:ext cx="9164648" cy="369332"/>
+            <a:off x="1463646" y="2855227"/>
+            <a:ext cx="9182106" cy="923330"/>
           </a:xfrm>
           <a:prstGeom prst="rect">
             <a:avLst/>
@@ -5464,22 +5155,23 @@
           <a:lstStyle/>
           <a:p>
             <a:r>
-              <a:rPr lang="en-US" b="1" dirty="0"/>
-              <a:t>7</a:t>
-            </a:r>
-            <a:r>
               <a:rPr lang="ru-RU" b="1" dirty="0"/>
-              <a:t>. Как гистограмма помогает в улучшении контраста изображения?</a:t>
-            </a:r>
-          </a:p>
-        </p:txBody>
-      </p:sp>
-      <p:sp>
-        <p:nvSpPr>
-          <p:cNvPr id="13" name="TextBox 12">
-            <a:extLst>
-              <a:ext uri="{FF2B5EF4-FFF2-40B4-BE49-F238E27FC236}">
-                <a16:creationId xmlns:a16="http://schemas.microsoft.com/office/drawing/2014/main" id="{6A0D2500-A0A1-8B4C-1976-D68650FD4B24}"/>
+              <a:t>Ответ: </a:t>
+            </a:r>
+            <a:r>
+              <a:rPr lang="ru-RU" dirty="0"/>
+              <a:t>Для серого (полутонового) изображения строится одна гистограмма общей яркости. Для цветного изображения строятся три отдельные гистограммы по каждому каналу (R, G, B) либо трехмерная гистограмма цветовых сочетаний.</a:t>
+            </a:r>
+            <a:endParaRPr lang="ru-RU" b="1" dirty="0"/>
+          </a:p>
+        </p:txBody>
+      </p:sp>
+      <p:sp>
+        <p:nvSpPr>
+          <p:cNvPr id="11" name="TextBox 10">
+            <a:extLst>
+              <a:ext uri="{FF2B5EF4-FFF2-40B4-BE49-F238E27FC236}">
+                <a16:creationId xmlns:a16="http://schemas.microsoft.com/office/drawing/2014/main" id="{BF6A8668-D6E4-5A1C-E82D-453FBC4EA553}"/>
               </a:ext>
             </a:extLst>
           </p:cNvPr>
@@ -5488,8 +5180,8 @@
         </p:nvSpPr>
         <p:spPr>
           <a:xfrm>
-            <a:off x="1463646" y="4171948"/>
-            <a:ext cx="9182106" cy="1200329"/>
+            <a:off x="1489086" y="3799624"/>
+            <a:ext cx="9164648" cy="369332"/>
           </a:xfrm>
           <a:prstGeom prst="rect">
             <a:avLst/>
@@ -5502,84 +5194,20 @@
           </a:bodyPr>
           <a:lstStyle/>
           <a:p>
+            <a:pPr algn="just"/>
             <a:r>
               <a:rPr lang="ru-RU" b="1" dirty="0"/>
-              <a:t>Ответ: </a:t>
-            </a:r>
-            <a:r>
-              <a:rPr lang="ru-RU" dirty="0"/>
-              <a:t>По ней определяют фактический диапазон яркостей</a:t>
-            </a:r>
-            <a:r>
-              <a:rPr lang="en-US" dirty="0"/>
-              <a:t> [</a:t>
-            </a:r>
-            <a:r>
-              <a:rPr lang="en-US" dirty="0" err="1"/>
-              <a:t>min,max</a:t>
-            </a:r>
-            <a:r>
-              <a:rPr lang="en-US" dirty="0"/>
-              <a:t>]</a:t>
-            </a:r>
-            <a:r>
-              <a:rPr lang="ru-RU" dirty="0"/>
-              <a:t>. Если он узкий, с помощью линейного растяжения его расширяют на весь интервал</a:t>
-            </a:r>
-            <a:r>
-              <a:rPr lang="en-US" dirty="0"/>
-              <a:t> [0,255]</a:t>
-            </a:r>
-            <a:r>
-              <a:rPr lang="ru-RU" dirty="0"/>
-              <a:t>, либо применяют </a:t>
-            </a:r>
-            <a:r>
-              <a:rPr lang="ru-RU" dirty="0" err="1"/>
-              <a:t>эквализацию</a:t>
-            </a:r>
-            <a:r>
-              <a:rPr lang="ru-RU" dirty="0"/>
-              <a:t> гистограммы для равномерного перераспределения яркостей и проявления скрытых деталей.</a:t>
-            </a:r>
-            <a:endParaRPr lang="ru-RU" b="1" dirty="0"/>
-          </a:p>
-        </p:txBody>
-      </p:sp>
-      <p:sp>
-        <p:nvSpPr>
-          <p:cNvPr id="15" name="Номер слайда 14">
-            <a:extLst>
-              <a:ext uri="{FF2B5EF4-FFF2-40B4-BE49-F238E27FC236}">
-                <a16:creationId xmlns:a16="http://schemas.microsoft.com/office/drawing/2014/main" id="{E5B656E7-25A9-3B44-9104-A4F257D11ED5}"/>
-              </a:ext>
-            </a:extLst>
-          </p:cNvPr>
-          <p:cNvSpPr>
-            <a:spLocks noGrp="1"/>
-          </p:cNvSpPr>
-          <p:nvPr>
-            <p:ph type="sldNum" sz="quarter" idx="12"/>
-          </p:nvPr>
-        </p:nvSpPr>
-        <p:spPr/>
-        <p:txBody>
-          <a:bodyPr/>
-          <a:lstStyle/>
-          <a:p>
-            <a:r>
-              <a:rPr lang="ru-RU" dirty="0"/>
-              <a:t>12</a:t>
-            </a:r>
-          </a:p>
-        </p:txBody>
-      </p:sp>
-      <p:sp>
-        <p:nvSpPr>
-          <p:cNvPr id="23" name="TextBox 22">
-            <a:extLst>
-              <a:ext uri="{FF2B5EF4-FFF2-40B4-BE49-F238E27FC236}">
-                <a16:creationId xmlns:a16="http://schemas.microsoft.com/office/drawing/2014/main" id="{C68041E8-32F9-ABD8-EC7F-35952EE7A7B5}"/>
+              <a:t>3. Что такое профиль изображения?</a:t>
+            </a:r>
+          </a:p>
+        </p:txBody>
+      </p:sp>
+      <p:sp>
+        <p:nvSpPr>
+          <p:cNvPr id="13" name="TextBox 12">
+            <a:extLst>
+              <a:ext uri="{FF2B5EF4-FFF2-40B4-BE49-F238E27FC236}">
+                <a16:creationId xmlns:a16="http://schemas.microsoft.com/office/drawing/2014/main" id="{6A0D2500-A0A1-8B4C-1976-D68650FD4B24}"/>
               </a:ext>
             </a:extLst>
           </p:cNvPr>
@@ -5588,8 +5216,8 @@
         </p:nvSpPr>
         <p:spPr>
           <a:xfrm>
-            <a:off x="1463646" y="2681545"/>
-            <a:ext cx="9182106" cy="1200329"/>
+            <a:off x="1463646" y="4086275"/>
+            <a:ext cx="9182106" cy="923330"/>
           </a:xfrm>
           <a:prstGeom prst="rect">
             <a:avLst/>
@@ -5608,31 +5236,159 @@
             </a:r>
             <a:r>
               <a:rPr lang="ru-RU" dirty="0"/>
-              <a:t>Профиль рассчитывается через усреднение (</a:t>
+              <a:t>Это одномерный график изменения интенсивности (яркости) пикселей вдоль заданной линии: либо срез по одной конкретной строке/столбцу, либо усредненное значение яркости строк или столбцов всего изображения.</a:t>
+            </a:r>
+            <a:endParaRPr lang="ru-RU" b="1" dirty="0"/>
+          </a:p>
+        </p:txBody>
+      </p:sp>
+      <p:sp>
+        <p:nvSpPr>
+          <p:cNvPr id="15" name="Номер слайда 14">
+            <a:extLst>
+              <a:ext uri="{FF2B5EF4-FFF2-40B4-BE49-F238E27FC236}">
+                <a16:creationId xmlns:a16="http://schemas.microsoft.com/office/drawing/2014/main" id="{E5B656E7-25A9-3B44-9104-A4F257D11ED5}"/>
+              </a:ext>
+            </a:extLst>
+          </p:cNvPr>
+          <p:cNvSpPr>
+            <a:spLocks noGrp="1"/>
+          </p:cNvSpPr>
+          <p:nvPr>
+            <p:ph type="sldNum" sz="quarter" idx="12"/>
+          </p:nvPr>
+        </p:nvSpPr>
+        <p:spPr/>
+        <p:txBody>
+          <a:bodyPr/>
+          <a:lstStyle/>
+          <a:p>
+            <a:r>
+              <a:rPr lang="ru-RU" dirty="0"/>
+              <a:t>12</a:t>
+            </a:r>
+          </a:p>
+        </p:txBody>
+      </p:sp>
+      <p:sp>
+        <p:nvSpPr>
+          <p:cNvPr id="16" name="TextBox 15">
+            <a:extLst>
+              <a:ext uri="{FF2B5EF4-FFF2-40B4-BE49-F238E27FC236}">
+                <a16:creationId xmlns:a16="http://schemas.microsoft.com/office/drawing/2014/main" id="{9FCB03C1-0B76-2E08-203C-12C1A8C68811}"/>
+              </a:ext>
+            </a:extLst>
+          </p:cNvPr>
+          <p:cNvSpPr txBox="1"/>
+          <p:nvPr/>
+        </p:nvSpPr>
+        <p:spPr>
+          <a:xfrm>
+            <a:off x="1478762" y="4972560"/>
+            <a:ext cx="9182106" cy="369332"/>
+          </a:xfrm>
+          <a:prstGeom prst="rect">
+            <a:avLst/>
+          </a:prstGeom>
+          <a:noFill/>
+        </p:spPr>
+        <p:txBody>
+          <a:bodyPr wrap="square" rtlCol="0" anchor="ctr">
+            <a:spAutoFit/>
+          </a:bodyPr>
+          <a:lstStyle/>
+          <a:p>
+            <a:pPr algn="just"/>
+            <a:r>
+              <a:rPr lang="ru-RU" b="1" dirty="0"/>
+              <a:t>4. Как вычисляется горизонтальный и вертикальный профиль?</a:t>
+            </a:r>
+          </a:p>
+        </p:txBody>
+      </p:sp>
+      <p:sp>
+        <p:nvSpPr>
+          <p:cNvPr id="17" name="TextBox 16">
+            <a:extLst>
+              <a:ext uri="{FF2B5EF4-FFF2-40B4-BE49-F238E27FC236}">
+                <a16:creationId xmlns:a16="http://schemas.microsoft.com/office/drawing/2014/main" id="{794C8A30-3803-DF2B-B667-815A58C44D49}"/>
+              </a:ext>
+            </a:extLst>
+          </p:cNvPr>
+          <p:cNvSpPr txBox="1"/>
+          <p:nvPr/>
+        </p:nvSpPr>
+        <p:spPr>
+          <a:xfrm>
+            <a:off x="1485893" y="5274938"/>
+            <a:ext cx="9167841" cy="946293"/>
+          </a:xfrm>
+          <a:prstGeom prst="rect">
+            <a:avLst/>
+          </a:prstGeom>
+          <a:noFill/>
+        </p:spPr>
+        <p:txBody>
+          <a:bodyPr wrap="square" rtlCol="0" anchor="ctr">
+            <a:spAutoFit/>
+          </a:bodyPr>
+          <a:lstStyle/>
+          <a:p>
+            <a:r>
+              <a:rPr lang="ru-RU" b="1" dirty="0"/>
+              <a:t>Ответ: </a:t>
+            </a:r>
+            <a:r>
+              <a:rPr lang="ru-RU" dirty="0"/>
+              <a:t> вычисляется усреднением значений пикселей вдоль строк (в Python: </a:t>
             </a:r>
             <a:r>
               <a:rPr lang="ru-RU" dirty="0" err="1"/>
-              <a:t>mean</a:t>
+              <a:t>np.mean</a:t>
             </a:r>
             <a:r>
               <a:rPr lang="ru-RU" dirty="0"/>
-              <a:t>) и сохраняет значения в исходном диапазоне яркостей (</a:t>
-            </a:r>
-            <a:r>
-              <a:rPr lang="en-US" dirty="0"/>
-              <a:t>0…255)</a:t>
+              <a:t>(</a:t>
+            </a:r>
+            <a:r>
+              <a:rPr lang="ru-RU" dirty="0" err="1"/>
+              <a:t>img</a:t>
             </a:r>
             <a:r>
               <a:rPr lang="ru-RU" dirty="0"/>
-              <a:t> , а проекция рассчитывается через суммирование (</a:t>
+              <a:t>, </a:t>
             </a:r>
             <a:r>
               <a:rPr lang="ru-RU" dirty="0" err="1"/>
-              <a:t>sum</a:t>
+              <a:t>axis</a:t>
             </a:r>
             <a:r>
               <a:rPr lang="ru-RU" dirty="0"/>
-              <a:t>) и показывает суммарную накопленную энергию сигнала, зависящую от геометрических размеров кадра.</a:t>
+              <a:t>=1)), а вертикальный — усреднением вдоль столбцов (</a:t>
+            </a:r>
+            <a:r>
+              <a:rPr lang="ru-RU" dirty="0" err="1"/>
+              <a:t>np.mean</a:t>
+            </a:r>
+            <a:r>
+              <a:rPr lang="ru-RU" dirty="0"/>
+              <a:t>(</a:t>
+            </a:r>
+            <a:r>
+              <a:rPr lang="ru-RU" dirty="0" err="1"/>
+              <a:t>img</a:t>
+            </a:r>
+            <a:r>
+              <a:rPr lang="ru-RU" dirty="0"/>
+              <a:t>, </a:t>
+            </a:r>
+            <a:r>
+              <a:rPr lang="ru-RU" dirty="0" err="1"/>
+              <a:t>axis</a:t>
+            </a:r>
+            <a:r>
+              <a:rPr lang="ru-RU" dirty="0"/>
+              <a:t>=0)).</a:t>
             </a:r>
             <a:endParaRPr lang="ru-RU" b="1" dirty="0"/>
           </a:p>
@@ -5641,7 +5397,7 @@
     </p:spTree>
     <p:extLst>
       <p:ext uri="{BB962C8B-B14F-4D97-AF65-F5344CB8AC3E}">
-        <p14:creationId xmlns:p14="http://schemas.microsoft.com/office/powerpoint/2010/main" val="408287326"/>
+        <p14:creationId xmlns:p14="http://schemas.microsoft.com/office/powerpoint/2010/main" val="560170823"/>
       </p:ext>
     </p:extLst>
   </p:cSld>
@@ -5719,8 +5475,8 @@
         </p:nvSpPr>
         <p:spPr>
           <a:xfrm>
-            <a:off x="1392495" y="1269525"/>
-            <a:ext cx="9182106" cy="646331"/>
+            <a:off x="1487488" y="1109915"/>
+            <a:ext cx="9182106" cy="369332"/>
           </a:xfrm>
           <a:prstGeom prst="rect">
             <a:avLst/>
@@ -5733,10 +5489,9 @@
           </a:bodyPr>
           <a:lstStyle/>
           <a:p>
-            <a:pPr algn="just"/>
             <a:r>
               <a:rPr lang="ru-RU" b="1" dirty="0"/>
-              <a:t>8. Как можно использовать горизонтальные и вертикальные проекции бинарного изображения?</a:t>
+              <a:t>5. Что такое проекция изображения?</a:t>
             </a:r>
           </a:p>
         </p:txBody>
@@ -5755,7 +5510,7 @@
         </p:nvSpPr>
         <p:spPr>
           <a:xfrm>
-            <a:off x="1401224" y="1790408"/>
+            <a:off x="1463646" y="1482239"/>
             <a:ext cx="9173377" cy="923330"/>
           </a:xfrm>
           <a:prstGeom prst="rect">
@@ -5775,15 +5530,39 @@
             </a:r>
             <a:r>
               <a:rPr lang="ru-RU" dirty="0"/>
-              <a:t>Их используют для поиска границ объектов (координат </a:t>
+              <a:t>Это одномерный сигнал, полученный путем суммирования (интегрирования) значений пикселей вдоль заданного направления: вдоль строк для горизонтальной проекции (</a:t>
             </a:r>
             <a:r>
               <a:rPr lang="ru-RU" dirty="0" err="1"/>
-              <a:t>Bounding</a:t>
+              <a:t>np.sum</a:t>
             </a:r>
             <a:r>
               <a:rPr lang="ru-RU" dirty="0"/>
-              <a:t> Box), разделения строк текста и отдельных букв в задачах OCR, а также для автоматической обрезки пустых полей документа.</a:t>
+              <a:t>(</a:t>
+            </a:r>
+            <a:r>
+              <a:rPr lang="ru-RU" dirty="0" err="1"/>
+              <a:t>axis</a:t>
+            </a:r>
+            <a:r>
+              <a:rPr lang="ru-RU" dirty="0"/>
+              <a:t>=1)) или вдоль столбцов для вертикальной (</a:t>
+            </a:r>
+            <a:r>
+              <a:rPr lang="ru-RU" dirty="0" err="1"/>
+              <a:t>np.sum</a:t>
+            </a:r>
+            <a:r>
+              <a:rPr lang="ru-RU" dirty="0"/>
+              <a:t>(</a:t>
+            </a:r>
+            <a:r>
+              <a:rPr lang="ru-RU" dirty="0" err="1"/>
+              <a:t>axis</a:t>
+            </a:r>
+            <a:r>
+              <a:rPr lang="ru-RU" dirty="0"/>
+              <a:t>=0)).</a:t>
             </a:r>
             <a:endParaRPr lang="ru-RU" b="1" dirty="0"/>
           </a:p>
@@ -5803,8 +5582,8 @@
         </p:nvSpPr>
         <p:spPr>
           <a:xfrm>
-            <a:off x="1401224" y="2649872"/>
-            <a:ext cx="9182106" cy="646331"/>
+            <a:off x="1463646" y="2394463"/>
+            <a:ext cx="9182106" cy="369332"/>
           </a:xfrm>
           <a:prstGeom prst="rect">
             <a:avLst/>
@@ -5817,24 +5596,19 @@
           </a:bodyPr>
           <a:lstStyle/>
           <a:p>
-            <a:pPr algn="just"/>
-            <a:r>
-              <a:rPr lang="en-US" b="1" dirty="0"/>
-              <a:t>9</a:t>
-            </a:r>
             <a:r>
               <a:rPr lang="ru-RU" b="1" dirty="0"/>
-              <a:t>.Как изменится гистограмма изображения после применения фильтра сглаживания?</a:t>
-            </a:r>
-          </a:p>
-        </p:txBody>
-      </p:sp>
-      <p:sp>
-        <p:nvSpPr>
-          <p:cNvPr id="9" name="TextBox 8">
-            <a:extLst>
-              <a:ext uri="{FF2B5EF4-FFF2-40B4-BE49-F238E27FC236}">
-                <a16:creationId xmlns:a16="http://schemas.microsoft.com/office/drawing/2014/main" id="{1B6288AE-09CC-5A07-59ED-90CC972FC3F3}"/>
+              <a:t>6. В чём разница между профилем и проекцией изображения?</a:t>
+            </a:r>
+          </a:p>
+        </p:txBody>
+      </p:sp>
+      <p:sp>
+        <p:nvSpPr>
+          <p:cNvPr id="11" name="TextBox 10">
+            <a:extLst>
+              <a:ext uri="{FF2B5EF4-FFF2-40B4-BE49-F238E27FC236}">
+                <a16:creationId xmlns:a16="http://schemas.microsoft.com/office/drawing/2014/main" id="{BF6A8668-D6E4-5A1C-E82D-453FBC4EA553}"/>
               </a:ext>
             </a:extLst>
           </p:cNvPr>
@@ -5843,8 +5617,8 @@
         </p:nvSpPr>
         <p:spPr>
           <a:xfrm>
-            <a:off x="1392498" y="3172224"/>
-            <a:ext cx="9182106" cy="923330"/>
+            <a:off x="1487490" y="3842245"/>
+            <a:ext cx="9164648" cy="369332"/>
           </a:xfrm>
           <a:prstGeom prst="rect">
             <a:avLst/>
@@ -5858,23 +5632,22 @@
           <a:lstStyle/>
           <a:p>
             <a:r>
+              <a:rPr lang="en-US" b="1" dirty="0"/>
+              <a:t>7</a:t>
+            </a:r>
+            <a:r>
               <a:rPr lang="ru-RU" b="1" dirty="0"/>
-              <a:t>Ответ: </a:t>
-            </a:r>
-            <a:r>
-              <a:rPr lang="ru-RU" dirty="0"/>
-              <a:t>Пиксели усредняются с соседями, поэтому крайние значения стягиваются к центру (уменьшается дисперсия), а форма гистограммы становится более плавной — исчезают резкие зубцы и выбросы от шума.</a:t>
-            </a:r>
-            <a:endParaRPr lang="ru-RU" b="1" dirty="0"/>
-          </a:p>
-        </p:txBody>
-      </p:sp>
-      <p:sp>
-        <p:nvSpPr>
-          <p:cNvPr id="11" name="TextBox 10">
-            <a:extLst>
-              <a:ext uri="{FF2B5EF4-FFF2-40B4-BE49-F238E27FC236}">
-                <a16:creationId xmlns:a16="http://schemas.microsoft.com/office/drawing/2014/main" id="{BF6A8668-D6E4-5A1C-E82D-453FBC4EA553}"/>
+              <a:t>. Как гистограмма помогает в улучшении контраста изображения?</a:t>
+            </a:r>
+          </a:p>
+        </p:txBody>
+      </p:sp>
+      <p:sp>
+        <p:nvSpPr>
+          <p:cNvPr id="13" name="TextBox 12">
+            <a:extLst>
+              <a:ext uri="{FF2B5EF4-FFF2-40B4-BE49-F238E27FC236}">
+                <a16:creationId xmlns:a16="http://schemas.microsoft.com/office/drawing/2014/main" id="{6A0D2500-A0A1-8B4C-1976-D68650FD4B24}"/>
               </a:ext>
             </a:extLst>
           </p:cNvPr>
@@ -5883,8 +5656,8 @@
         </p:nvSpPr>
         <p:spPr>
           <a:xfrm>
-            <a:off x="1402822" y="4051563"/>
-            <a:ext cx="9164648" cy="369332"/>
+            <a:off x="1463646" y="4171948"/>
+            <a:ext cx="9182106" cy="1200329"/>
           </a:xfrm>
           <a:prstGeom prst="rect">
             <a:avLst/>
@@ -5897,20 +5670,84 @@
           </a:bodyPr>
           <a:lstStyle/>
           <a:p>
-            <a:pPr algn="just"/>
             <a:r>
               <a:rPr lang="ru-RU" b="1" dirty="0"/>
-              <a:t>10. Что показывает пик на гистограмме изображения?</a:t>
-            </a:r>
-          </a:p>
-        </p:txBody>
-      </p:sp>
-      <p:sp>
-        <p:nvSpPr>
-          <p:cNvPr id="13" name="TextBox 12">
-            <a:extLst>
-              <a:ext uri="{FF2B5EF4-FFF2-40B4-BE49-F238E27FC236}">
-                <a16:creationId xmlns:a16="http://schemas.microsoft.com/office/drawing/2014/main" id="{6A0D2500-A0A1-8B4C-1976-D68650FD4B24}"/>
+              <a:t>Ответ: </a:t>
+            </a:r>
+            <a:r>
+              <a:rPr lang="ru-RU" dirty="0"/>
+              <a:t>По ней определяют фактический диапазон яркостей</a:t>
+            </a:r>
+            <a:r>
+              <a:rPr lang="en-US" dirty="0"/>
+              <a:t> [</a:t>
+            </a:r>
+            <a:r>
+              <a:rPr lang="en-US" dirty="0" err="1"/>
+              <a:t>min,max</a:t>
+            </a:r>
+            <a:r>
+              <a:rPr lang="en-US" dirty="0"/>
+              <a:t>]</a:t>
+            </a:r>
+            <a:r>
+              <a:rPr lang="ru-RU" dirty="0"/>
+              <a:t>. Если он узкий, с помощью линейного растяжения его расширяют на весь интервал</a:t>
+            </a:r>
+            <a:r>
+              <a:rPr lang="en-US" dirty="0"/>
+              <a:t> [0,255]</a:t>
+            </a:r>
+            <a:r>
+              <a:rPr lang="ru-RU" dirty="0"/>
+              <a:t>, либо применяют </a:t>
+            </a:r>
+            <a:r>
+              <a:rPr lang="ru-RU" dirty="0" err="1"/>
+              <a:t>эквализацию</a:t>
+            </a:r>
+            <a:r>
+              <a:rPr lang="ru-RU" dirty="0"/>
+              <a:t> гистограммы для равномерного перераспределения яркостей и проявления скрытых деталей.</a:t>
+            </a:r>
+            <a:endParaRPr lang="ru-RU" b="1" dirty="0"/>
+          </a:p>
+        </p:txBody>
+      </p:sp>
+      <p:sp>
+        <p:nvSpPr>
+          <p:cNvPr id="15" name="Номер слайда 14">
+            <a:extLst>
+              <a:ext uri="{FF2B5EF4-FFF2-40B4-BE49-F238E27FC236}">
+                <a16:creationId xmlns:a16="http://schemas.microsoft.com/office/drawing/2014/main" id="{E5B656E7-25A9-3B44-9104-A4F257D11ED5}"/>
+              </a:ext>
+            </a:extLst>
+          </p:cNvPr>
+          <p:cNvSpPr>
+            <a:spLocks noGrp="1"/>
+          </p:cNvSpPr>
+          <p:nvPr>
+            <p:ph type="sldNum" sz="quarter" idx="12"/>
+          </p:nvPr>
+        </p:nvSpPr>
+        <p:spPr/>
+        <p:txBody>
+          <a:bodyPr/>
+          <a:lstStyle/>
+          <a:p>
+            <a:r>
+              <a:rPr lang="ru-RU" dirty="0"/>
+              <a:t>12</a:t>
+            </a:r>
+          </a:p>
+        </p:txBody>
+      </p:sp>
+      <p:sp>
+        <p:nvSpPr>
+          <p:cNvPr id="23" name="TextBox 22">
+            <a:extLst>
+              <a:ext uri="{FF2B5EF4-FFF2-40B4-BE49-F238E27FC236}">
+                <a16:creationId xmlns:a16="http://schemas.microsoft.com/office/drawing/2014/main" id="{C68041E8-32F9-ABD8-EC7F-35952EE7A7B5}"/>
               </a:ext>
             </a:extLst>
           </p:cNvPr>
@@ -5919,8 +5756,8 @@
         </p:nvSpPr>
         <p:spPr>
           <a:xfrm>
-            <a:off x="1377382" y="4338214"/>
-            <a:ext cx="9182106" cy="923330"/>
+            <a:off x="1463646" y="2681545"/>
+            <a:ext cx="9182106" cy="1200329"/>
           </a:xfrm>
           <a:prstGeom prst="rect">
             <a:avLst/>
@@ -5939,52 +5776,40 @@
             </a:r>
             <a:r>
               <a:rPr lang="ru-RU" dirty="0"/>
-              <a:t>Пик указывает на преобладание в кадре конкретного уровня яркости, что обычно соответствует большой однородной области — например, фону, сплошной тени или </a:t>
+              <a:t>Профиль рассчитывается через усреднение (</a:t>
             </a:r>
             <a:r>
               <a:rPr lang="ru-RU" dirty="0" err="1"/>
-              <a:t>пересвеченному</a:t>
+              <a:t>mean</a:t>
             </a:r>
             <a:r>
               <a:rPr lang="ru-RU" dirty="0"/>
-              <a:t> участку.</a:t>
+              <a:t>) и сохраняет значения в исходном диапазоне яркостей (</a:t>
+            </a:r>
+            <a:r>
+              <a:rPr lang="en-US" dirty="0"/>
+              <a:t>0…255)</a:t>
+            </a:r>
+            <a:r>
+              <a:rPr lang="ru-RU" dirty="0"/>
+              <a:t> , а проекция рассчитывается через суммирование (</a:t>
+            </a:r>
+            <a:r>
+              <a:rPr lang="ru-RU" dirty="0" err="1"/>
+              <a:t>sum</a:t>
+            </a:r>
+            <a:r>
+              <a:rPr lang="ru-RU" dirty="0"/>
+              <a:t>) и показывает суммарную накопленную энергию сигнала, зависящую от геометрических размеров кадра.</a:t>
             </a:r>
             <a:endParaRPr lang="ru-RU" b="1" dirty="0"/>
-          </a:p>
-        </p:txBody>
-      </p:sp>
-      <p:sp>
-        <p:nvSpPr>
-          <p:cNvPr id="15" name="Номер слайда 14">
-            <a:extLst>
-              <a:ext uri="{FF2B5EF4-FFF2-40B4-BE49-F238E27FC236}">
-                <a16:creationId xmlns:a16="http://schemas.microsoft.com/office/drawing/2014/main" id="{E5B656E7-25A9-3B44-9104-A4F257D11ED5}"/>
-              </a:ext>
-            </a:extLst>
-          </p:cNvPr>
-          <p:cNvSpPr>
-            <a:spLocks noGrp="1"/>
-          </p:cNvSpPr>
-          <p:nvPr>
-            <p:ph type="sldNum" sz="quarter" idx="12"/>
-          </p:nvPr>
-        </p:nvSpPr>
-        <p:spPr/>
-        <p:txBody>
-          <a:bodyPr/>
-          <a:lstStyle/>
-          <a:p>
-            <a:r>
-              <a:rPr lang="ru-RU" dirty="0"/>
-              <a:t>12</a:t>
-            </a:r>
           </a:p>
         </p:txBody>
       </p:sp>
     </p:spTree>
     <p:extLst>
       <p:ext uri="{BB962C8B-B14F-4D97-AF65-F5344CB8AC3E}">
-        <p14:creationId xmlns:p14="http://schemas.microsoft.com/office/powerpoint/2010/main" val="4273256162"/>
+        <p14:creationId xmlns:p14="http://schemas.microsoft.com/office/powerpoint/2010/main" val="408287326"/>
       </p:ext>
     </p:extLst>
   </p:cSld>
@@ -6013,6 +5838,349 @@
       </p:grpSpPr>
       <p:sp>
         <p:nvSpPr>
+          <p:cNvPr id="5" name="TextBox 4">
+            <a:extLst>
+              <a:ext uri="{FF2B5EF4-FFF2-40B4-BE49-F238E27FC236}">
+                <a16:creationId xmlns:a16="http://schemas.microsoft.com/office/drawing/2014/main" id="{B41B6E55-C1E7-22C7-FFCB-604BB72C480D}"/>
+              </a:ext>
+            </a:extLst>
+          </p:cNvPr>
+          <p:cNvSpPr txBox="1"/>
+          <p:nvPr/>
+        </p:nvSpPr>
+        <p:spPr>
+          <a:xfrm>
+            <a:off x="1478764" y="503478"/>
+            <a:ext cx="9182101" cy="766047"/>
+          </a:xfrm>
+          <a:prstGeom prst="rect">
+            <a:avLst/>
+          </a:prstGeom>
+          <a:noFill/>
+        </p:spPr>
+        <p:txBody>
+          <a:bodyPr wrap="square" rtlCol="0" anchor="ctr">
+            <a:spAutoFit/>
+          </a:bodyPr>
+          <a:lstStyle/>
+          <a:p>
+            <a:r>
+              <a:rPr lang="ru-RU" sz="2800" b="1" dirty="0">
+                <a:latin typeface="+mj-lt"/>
+              </a:rPr>
+              <a:t>Контрольные вопросы</a:t>
+            </a:r>
+          </a:p>
+        </p:txBody>
+      </p:sp>
+      <p:sp>
+        <p:nvSpPr>
+          <p:cNvPr id="20" name="TextBox 19">
+            <a:extLst>
+              <a:ext uri="{FF2B5EF4-FFF2-40B4-BE49-F238E27FC236}">
+                <a16:creationId xmlns:a16="http://schemas.microsoft.com/office/drawing/2014/main" id="{71F5B869-FCA3-91D3-678D-F5E5BE3D9772}"/>
+              </a:ext>
+            </a:extLst>
+          </p:cNvPr>
+          <p:cNvSpPr txBox="1"/>
+          <p:nvPr/>
+        </p:nvSpPr>
+        <p:spPr>
+          <a:xfrm>
+            <a:off x="1392495" y="1269525"/>
+            <a:ext cx="9182106" cy="646331"/>
+          </a:xfrm>
+          <a:prstGeom prst="rect">
+            <a:avLst/>
+          </a:prstGeom>
+          <a:noFill/>
+        </p:spPr>
+        <p:txBody>
+          <a:bodyPr wrap="square" rtlCol="0" anchor="ctr">
+            <a:spAutoFit/>
+          </a:bodyPr>
+          <a:lstStyle/>
+          <a:p>
+            <a:pPr algn="just"/>
+            <a:r>
+              <a:rPr lang="ru-RU" b="1" dirty="0"/>
+              <a:t>8. Как можно использовать горизонтальные и вертикальные проекции бинарного изображения?</a:t>
+            </a:r>
+          </a:p>
+        </p:txBody>
+      </p:sp>
+      <p:sp>
+        <p:nvSpPr>
+          <p:cNvPr id="7" name="TextBox 6">
+            <a:extLst>
+              <a:ext uri="{FF2B5EF4-FFF2-40B4-BE49-F238E27FC236}">
+                <a16:creationId xmlns:a16="http://schemas.microsoft.com/office/drawing/2014/main" id="{D665E4DE-7D6B-49F6-7D70-49D3CC230020}"/>
+              </a:ext>
+            </a:extLst>
+          </p:cNvPr>
+          <p:cNvSpPr txBox="1"/>
+          <p:nvPr/>
+        </p:nvSpPr>
+        <p:spPr>
+          <a:xfrm>
+            <a:off x="1401224" y="1790408"/>
+            <a:ext cx="9173377" cy="923330"/>
+          </a:xfrm>
+          <a:prstGeom prst="rect">
+            <a:avLst/>
+          </a:prstGeom>
+          <a:noFill/>
+        </p:spPr>
+        <p:txBody>
+          <a:bodyPr wrap="square" rtlCol="0" anchor="ctr">
+            <a:spAutoFit/>
+          </a:bodyPr>
+          <a:lstStyle/>
+          <a:p>
+            <a:r>
+              <a:rPr lang="ru-RU" b="1" dirty="0"/>
+              <a:t>Ответ: </a:t>
+            </a:r>
+            <a:r>
+              <a:rPr lang="ru-RU" dirty="0"/>
+              <a:t>Их используют для поиска границ объектов (координат </a:t>
+            </a:r>
+            <a:r>
+              <a:rPr lang="ru-RU" dirty="0" err="1"/>
+              <a:t>Bounding</a:t>
+            </a:r>
+            <a:r>
+              <a:rPr lang="ru-RU" dirty="0"/>
+              <a:t> Box), разделения строк текста и отдельных букв в задачах OCR, а также для автоматической обрезки пустых полей документа.</a:t>
+            </a:r>
+            <a:endParaRPr lang="ru-RU" b="1" dirty="0"/>
+          </a:p>
+        </p:txBody>
+      </p:sp>
+      <p:sp>
+        <p:nvSpPr>
+          <p:cNvPr id="8" name="TextBox 7">
+            <a:extLst>
+              <a:ext uri="{FF2B5EF4-FFF2-40B4-BE49-F238E27FC236}">
+                <a16:creationId xmlns:a16="http://schemas.microsoft.com/office/drawing/2014/main" id="{22BCE2EF-1E4E-4104-5239-E6203734018B}"/>
+              </a:ext>
+            </a:extLst>
+          </p:cNvPr>
+          <p:cNvSpPr txBox="1"/>
+          <p:nvPr/>
+        </p:nvSpPr>
+        <p:spPr>
+          <a:xfrm>
+            <a:off x="1401224" y="2649872"/>
+            <a:ext cx="9182106" cy="646331"/>
+          </a:xfrm>
+          <a:prstGeom prst="rect">
+            <a:avLst/>
+          </a:prstGeom>
+          <a:noFill/>
+        </p:spPr>
+        <p:txBody>
+          <a:bodyPr wrap="square" rtlCol="0" anchor="ctr">
+            <a:spAutoFit/>
+          </a:bodyPr>
+          <a:lstStyle/>
+          <a:p>
+            <a:pPr algn="just"/>
+            <a:r>
+              <a:rPr lang="en-US" b="1" dirty="0"/>
+              <a:t>9</a:t>
+            </a:r>
+            <a:r>
+              <a:rPr lang="ru-RU" b="1" dirty="0"/>
+              <a:t>.Как изменится гистограмма изображения после применения фильтра сглаживания?</a:t>
+            </a:r>
+          </a:p>
+        </p:txBody>
+      </p:sp>
+      <p:sp>
+        <p:nvSpPr>
+          <p:cNvPr id="9" name="TextBox 8">
+            <a:extLst>
+              <a:ext uri="{FF2B5EF4-FFF2-40B4-BE49-F238E27FC236}">
+                <a16:creationId xmlns:a16="http://schemas.microsoft.com/office/drawing/2014/main" id="{1B6288AE-09CC-5A07-59ED-90CC972FC3F3}"/>
+              </a:ext>
+            </a:extLst>
+          </p:cNvPr>
+          <p:cNvSpPr txBox="1"/>
+          <p:nvPr/>
+        </p:nvSpPr>
+        <p:spPr>
+          <a:xfrm>
+            <a:off x="1392498" y="3172224"/>
+            <a:ext cx="9182106" cy="923330"/>
+          </a:xfrm>
+          <a:prstGeom prst="rect">
+            <a:avLst/>
+          </a:prstGeom>
+          <a:noFill/>
+        </p:spPr>
+        <p:txBody>
+          <a:bodyPr wrap="square" rtlCol="0" anchor="ctr">
+            <a:spAutoFit/>
+          </a:bodyPr>
+          <a:lstStyle/>
+          <a:p>
+            <a:r>
+              <a:rPr lang="ru-RU" b="1" dirty="0"/>
+              <a:t>Ответ: </a:t>
+            </a:r>
+            <a:r>
+              <a:rPr lang="ru-RU" dirty="0"/>
+              <a:t>Пиксели усредняются с соседями, поэтому крайние значения стягиваются к центру (уменьшается дисперсия), а форма гистограммы становится более плавной — исчезают резкие зубцы и выбросы от шума.</a:t>
+            </a:r>
+            <a:endParaRPr lang="ru-RU" b="1" dirty="0"/>
+          </a:p>
+        </p:txBody>
+      </p:sp>
+      <p:sp>
+        <p:nvSpPr>
+          <p:cNvPr id="11" name="TextBox 10">
+            <a:extLst>
+              <a:ext uri="{FF2B5EF4-FFF2-40B4-BE49-F238E27FC236}">
+                <a16:creationId xmlns:a16="http://schemas.microsoft.com/office/drawing/2014/main" id="{BF6A8668-D6E4-5A1C-E82D-453FBC4EA553}"/>
+              </a:ext>
+            </a:extLst>
+          </p:cNvPr>
+          <p:cNvSpPr txBox="1"/>
+          <p:nvPr/>
+        </p:nvSpPr>
+        <p:spPr>
+          <a:xfrm>
+            <a:off x="1402822" y="4051563"/>
+            <a:ext cx="9164648" cy="369332"/>
+          </a:xfrm>
+          <a:prstGeom prst="rect">
+            <a:avLst/>
+          </a:prstGeom>
+          <a:noFill/>
+        </p:spPr>
+        <p:txBody>
+          <a:bodyPr wrap="square" rtlCol="0" anchor="ctr">
+            <a:spAutoFit/>
+          </a:bodyPr>
+          <a:lstStyle/>
+          <a:p>
+            <a:pPr algn="just"/>
+            <a:r>
+              <a:rPr lang="ru-RU" b="1" dirty="0"/>
+              <a:t>10. Что показывает пик на гистограмме изображения?</a:t>
+            </a:r>
+          </a:p>
+        </p:txBody>
+      </p:sp>
+      <p:sp>
+        <p:nvSpPr>
+          <p:cNvPr id="13" name="TextBox 12">
+            <a:extLst>
+              <a:ext uri="{FF2B5EF4-FFF2-40B4-BE49-F238E27FC236}">
+                <a16:creationId xmlns:a16="http://schemas.microsoft.com/office/drawing/2014/main" id="{6A0D2500-A0A1-8B4C-1976-D68650FD4B24}"/>
+              </a:ext>
+            </a:extLst>
+          </p:cNvPr>
+          <p:cNvSpPr txBox="1"/>
+          <p:nvPr/>
+        </p:nvSpPr>
+        <p:spPr>
+          <a:xfrm>
+            <a:off x="1377382" y="4338214"/>
+            <a:ext cx="9182106" cy="923330"/>
+          </a:xfrm>
+          <a:prstGeom prst="rect">
+            <a:avLst/>
+          </a:prstGeom>
+          <a:noFill/>
+        </p:spPr>
+        <p:txBody>
+          <a:bodyPr wrap="square" rtlCol="0" anchor="ctr">
+            <a:spAutoFit/>
+          </a:bodyPr>
+          <a:lstStyle/>
+          <a:p>
+            <a:r>
+              <a:rPr lang="ru-RU" b="1" dirty="0"/>
+              <a:t>Ответ: </a:t>
+            </a:r>
+            <a:r>
+              <a:rPr lang="ru-RU" dirty="0"/>
+              <a:t>Пик указывает на преобладание в кадре конкретного уровня яркости, что обычно соответствует большой однородной области — например, фону, сплошной тени или </a:t>
+            </a:r>
+            <a:r>
+              <a:rPr lang="ru-RU" dirty="0" err="1"/>
+              <a:t>пересвеченному</a:t>
+            </a:r>
+            <a:r>
+              <a:rPr lang="ru-RU" dirty="0"/>
+              <a:t> участку.</a:t>
+            </a:r>
+            <a:endParaRPr lang="ru-RU" b="1" dirty="0"/>
+          </a:p>
+        </p:txBody>
+      </p:sp>
+      <p:sp>
+        <p:nvSpPr>
+          <p:cNvPr id="15" name="Номер слайда 14">
+            <a:extLst>
+              <a:ext uri="{FF2B5EF4-FFF2-40B4-BE49-F238E27FC236}">
+                <a16:creationId xmlns:a16="http://schemas.microsoft.com/office/drawing/2014/main" id="{E5B656E7-25A9-3B44-9104-A4F257D11ED5}"/>
+              </a:ext>
+            </a:extLst>
+          </p:cNvPr>
+          <p:cNvSpPr>
+            <a:spLocks noGrp="1"/>
+          </p:cNvSpPr>
+          <p:nvPr>
+            <p:ph type="sldNum" sz="quarter" idx="12"/>
+          </p:nvPr>
+        </p:nvSpPr>
+        <p:spPr/>
+        <p:txBody>
+          <a:bodyPr/>
+          <a:lstStyle/>
+          <a:p>
+            <a:r>
+              <a:rPr lang="ru-RU" dirty="0"/>
+              <a:t>12</a:t>
+            </a:r>
+          </a:p>
+        </p:txBody>
+      </p:sp>
+    </p:spTree>
+    <p:extLst>
+      <p:ext uri="{BB962C8B-B14F-4D97-AF65-F5344CB8AC3E}">
+        <p14:creationId xmlns:p14="http://schemas.microsoft.com/office/powerpoint/2010/main" val="4273256162"/>
+      </p:ext>
+    </p:extLst>
+  </p:cSld>
+  <p:clrMapOvr>
+    <a:masterClrMapping/>
+  </p:clrMapOvr>
+</p:sld>
+</file>
+
+<file path=ppt/slides/slide18.xml><?xml version="1.0" encoding="utf-8"?>
+<p:sld xmlns:a="http://schemas.openxmlformats.org/drawingml/2006/main" xmlns:r="http://schemas.openxmlformats.org/officeDocument/2006/relationships" xmlns:p="http://schemas.openxmlformats.org/presentationml/2006/main">
+  <p:cSld>
+    <p:spTree>
+      <p:nvGrpSpPr>
+        <p:cNvPr id="1" name=""/>
+        <p:cNvGrpSpPr/>
+        <p:nvPr/>
+      </p:nvGrpSpPr>
+      <p:grpSpPr>
+        <a:xfrm>
+          <a:off x="0" y="0"/>
+          <a:ext cx="0" cy="0"/>
+          <a:chOff x="0" y="0"/>
+          <a:chExt cx="0" cy="0"/>
+        </a:xfrm>
+      </p:grpSpPr>
+      <p:sp>
+        <p:nvSpPr>
           <p:cNvPr id="2" name="Заголовок 1">
             <a:extLst>
               <a:ext uri="{FF2B5EF4-FFF2-40B4-BE49-F238E27FC236}">
@@ -6068,7 +6236,7 @@
           <a:p>
             <a:fld id="{89A371D6-626E-4711-87E0-599E0F8A4C97}" type="slidenum">
               <a:rPr lang="ru-RU" smtClean="0"/>
-              <a:t>17</a:t>
+              <a:t>18</a:t>
             </a:fld>
             <a:endParaRPr lang="ru-RU"/>
           </a:p>
@@ -6106,116 +6274,164 @@
       </p:grpSpPr>
       <p:sp>
         <p:nvSpPr>
-          <p:cNvPr id="5" name="TextBox 4">
-            <a:extLst>
-              <a:ext uri="{FF2B5EF4-FFF2-40B4-BE49-F238E27FC236}">
-                <a16:creationId xmlns:a16="http://schemas.microsoft.com/office/drawing/2014/main" id="{B41B6E55-C1E7-22C7-FFCB-604BB72C480D}"/>
-              </a:ext>
-            </a:extLst>
-          </p:cNvPr>
-          <p:cNvSpPr txBox="1"/>
-          <p:nvPr/>
-        </p:nvSpPr>
-        <p:spPr>
-          <a:xfrm>
-            <a:off x="1485899" y="565739"/>
-            <a:ext cx="9212778" cy="523220"/>
-          </a:xfrm>
-          <a:prstGeom prst="rect">
-            <a:avLst/>
-          </a:prstGeom>
-          <a:noFill/>
-        </p:spPr>
-        <p:txBody>
-          <a:bodyPr wrap="square" rtlCol="0" anchor="ctr">
-            <a:spAutoFit/>
+          <p:cNvPr id="2" name="Заголовок 1">
+            <a:extLst>
+              <a:ext uri="{FF2B5EF4-FFF2-40B4-BE49-F238E27FC236}">
+                <a16:creationId xmlns:a16="http://schemas.microsoft.com/office/drawing/2014/main" id="{1A75B349-53B7-2440-E02F-489C9877A388}"/>
+              </a:ext>
+            </a:extLst>
+          </p:cNvPr>
+          <p:cNvSpPr>
+            <a:spLocks noGrp="1"/>
+          </p:cNvSpPr>
+          <p:nvPr>
+            <p:ph type="title"/>
+          </p:nvPr>
+        </p:nvSpPr>
+        <p:spPr/>
+        <p:txBody>
+          <a:bodyPr>
+            <a:normAutofit/>
           </a:bodyPr>
           <a:lstStyle/>
           <a:p>
             <a:r>
-              <a:rPr lang="ru-RU" sz="2800" b="1" dirty="0"/>
-              <a:t>Загрузка данных и предварительная обработка</a:t>
-            </a:r>
-          </a:p>
-        </p:txBody>
-      </p:sp>
-      <p:sp>
-        <p:nvSpPr>
-          <p:cNvPr id="20" name="TextBox 19">
-            <a:extLst>
-              <a:ext uri="{FF2B5EF4-FFF2-40B4-BE49-F238E27FC236}">
-                <a16:creationId xmlns:a16="http://schemas.microsoft.com/office/drawing/2014/main" id="{71F5B869-FCA3-91D3-678D-F5E5BE3D9772}"/>
-              </a:ext>
-            </a:extLst>
-          </p:cNvPr>
-          <p:cNvSpPr txBox="1"/>
-          <p:nvPr/>
-        </p:nvSpPr>
-        <p:spPr>
-          <a:xfrm>
-            <a:off x="1485899" y="1387094"/>
-            <a:ext cx="9182101" cy="1015663"/>
-          </a:xfrm>
-          <a:prstGeom prst="rect">
-            <a:avLst/>
-          </a:prstGeom>
-          <a:noFill/>
-        </p:spPr>
-        <p:txBody>
-          <a:bodyPr wrap="square" rtlCol="0" anchor="ctr">
-            <a:spAutoFit/>
+              <a:rPr lang="ru-RU" sz="2800" b="1" dirty="0">
+                <a:latin typeface="+mn-lt"/>
+              </a:rPr>
+              <a:t>Задания</a:t>
+            </a:r>
+          </a:p>
+        </p:txBody>
+      </p:sp>
+      <p:sp>
+        <p:nvSpPr>
+          <p:cNvPr id="3" name="Объект 2">
+            <a:extLst>
+              <a:ext uri="{FF2B5EF4-FFF2-40B4-BE49-F238E27FC236}">
+                <a16:creationId xmlns:a16="http://schemas.microsoft.com/office/drawing/2014/main" id="{C14A078A-D5D7-5B07-C4F8-ADB919DBBB59}"/>
+              </a:ext>
+            </a:extLst>
+          </p:cNvPr>
+          <p:cNvSpPr>
+            <a:spLocks noGrp="1"/>
+          </p:cNvSpPr>
+          <p:nvPr>
+            <p:ph idx="1"/>
+          </p:nvPr>
+        </p:nvSpPr>
+        <p:spPr/>
+        <p:txBody>
+          <a:bodyPr>
+            <a:normAutofit fontScale="85000" lnSpcReduction="10000"/>
           </a:bodyPr>
           <a:lstStyle/>
           <a:p>
-            <a:r>
-              <a:rPr lang="ru-RU" sz="2000" dirty="0"/>
-              <a:t>Подготовить рабочие матрицы изображения: цветную 3-канальную для проекций и одноканальную полутоновую для яркостного, градиентного и порогового анализа.</a:t>
-            </a:r>
-          </a:p>
-        </p:txBody>
-      </p:sp>
-      <p:sp>
-        <p:nvSpPr>
-          <p:cNvPr id="21" name="TextBox 20">
-            <a:extLst>
-              <a:ext uri="{FF2B5EF4-FFF2-40B4-BE49-F238E27FC236}">
-                <a16:creationId xmlns:a16="http://schemas.microsoft.com/office/drawing/2014/main" id="{0C569071-A5F8-E7C9-1DC2-DF3EA9F88597}"/>
-              </a:ext>
-            </a:extLst>
-          </p:cNvPr>
-          <p:cNvSpPr txBox="1"/>
-          <p:nvPr/>
-        </p:nvSpPr>
-        <p:spPr>
-          <a:xfrm>
-            <a:off x="1577488" y="2700892"/>
-            <a:ext cx="4203831" cy="369332"/>
-          </a:xfrm>
-          <a:prstGeom prst="rect">
-            <a:avLst/>
-          </a:prstGeom>
-          <a:noFill/>
-        </p:spPr>
-        <p:txBody>
-          <a:bodyPr wrap="square" rtlCol="0" anchor="ctr">
-            <a:spAutoFit/>
-          </a:bodyPr>
-          <a:lstStyle/>
-          <a:p>
-            <a:pPr algn="ctr"/>
-            <a:r>
-              <a:rPr lang="ru-RU" b="1" dirty="0"/>
-              <a:t>Код:</a:t>
-            </a:r>
-          </a:p>
-        </p:txBody>
-      </p:sp>
-      <p:sp>
-        <p:nvSpPr>
-          <p:cNvPr id="7" name="Номер слайда 6">
-            <a:extLst>
-              <a:ext uri="{FF2B5EF4-FFF2-40B4-BE49-F238E27FC236}">
-                <a16:creationId xmlns:a16="http://schemas.microsoft.com/office/drawing/2014/main" id="{D024ECB0-4347-288D-3116-357235DC7F95}"/>
+            <a:pPr marL="0" indent="0">
+              <a:buNone/>
+            </a:pPr>
+            <a:r>
+              <a:rPr lang="ru-RU" dirty="0"/>
+              <a:t>1. Построить гистограмму изображения и определить минимум,</a:t>
+            </a:r>
+          </a:p>
+          <a:p>
+            <a:pPr marL="0" indent="0">
+              <a:buNone/>
+            </a:pPr>
+            <a:r>
+              <a:rPr lang="ru-RU" dirty="0"/>
+              <a:t>максимум и медиану яркости.</a:t>
+            </a:r>
+          </a:p>
+          <a:p>
+            <a:pPr marL="0" indent="0">
+              <a:buNone/>
+            </a:pPr>
+            <a:r>
+              <a:rPr lang="ru-RU" dirty="0"/>
+              <a:t>2. Построить профили изображения после применения фильтра «</a:t>
+            </a:r>
+            <a:r>
+              <a:rPr lang="ru-RU" dirty="0" err="1"/>
+              <a:t>Собель</a:t>
+            </a:r>
+            <a:r>
+              <a:rPr lang="ru-RU" dirty="0"/>
+              <a:t>»</a:t>
+            </a:r>
+          </a:p>
+          <a:p>
+            <a:pPr marL="0" indent="0">
+              <a:buNone/>
+            </a:pPr>
+            <a:r>
+              <a:rPr lang="ru-RU" dirty="0"/>
+              <a:t>по X и Y.</a:t>
+            </a:r>
+          </a:p>
+          <a:p>
+            <a:pPr marL="0" indent="0">
+              <a:buNone/>
+            </a:pPr>
+            <a:r>
+              <a:rPr lang="ru-RU" dirty="0"/>
+              <a:t>3. Построить горизонтальную и вертикальную проекции цветного</a:t>
+            </a:r>
+          </a:p>
+          <a:p>
+            <a:pPr marL="0" indent="0">
+              <a:buNone/>
+            </a:pPr>
+            <a:r>
+              <a:rPr lang="ru-RU" dirty="0"/>
+              <a:t>изображения (суммируя по каналам).</a:t>
+            </a:r>
+          </a:p>
+          <a:p>
+            <a:pPr marL="0" indent="0">
+              <a:buNone/>
+            </a:pPr>
+            <a:r>
+              <a:rPr lang="ru-RU" dirty="0"/>
+              <a:t>4. Найти строки с пикселями выше порога в горизонтальной проекции</a:t>
+            </a:r>
+          </a:p>
+          <a:p>
+            <a:pPr marL="0" indent="0">
+              <a:buNone/>
+            </a:pPr>
+            <a:r>
+              <a:rPr lang="ru-RU" dirty="0"/>
+              <a:t>бинарного изображения.</a:t>
+            </a:r>
+          </a:p>
+          <a:p>
+            <a:pPr marL="0" indent="0">
+              <a:buNone/>
+            </a:pPr>
+            <a:r>
+              <a:rPr lang="ru-RU" dirty="0"/>
+              <a:t>5. Найти столбцы с пикселями выше порога в вертикальной проекции</a:t>
+            </a:r>
+          </a:p>
+          <a:p>
+            <a:pPr marL="0" indent="0">
+              <a:buNone/>
+            </a:pPr>
+            <a:r>
+              <a:rPr lang="ru-RU" dirty="0"/>
+              <a:t>бинарного изображения.</a:t>
+            </a:r>
+          </a:p>
+        </p:txBody>
+      </p:sp>
+      <p:sp>
+        <p:nvSpPr>
+          <p:cNvPr id="4" name="Номер слайда 3">
+            <a:extLst>
+              <a:ext uri="{FF2B5EF4-FFF2-40B4-BE49-F238E27FC236}">
+                <a16:creationId xmlns:a16="http://schemas.microsoft.com/office/drawing/2014/main" id="{BA1EA1AE-2C5B-FB9C-5E04-AC6D5FF9EC42}"/>
               </a:ext>
             </a:extLst>
           </p:cNvPr>
@@ -6239,106 +6455,10 @@
           </a:p>
         </p:txBody>
       </p:sp>
-      <p:pic>
-        <p:nvPicPr>
-          <p:cNvPr id="9" name="Рисунок 8">
-            <a:extLst>
-              <a:ext uri="{FF2B5EF4-FFF2-40B4-BE49-F238E27FC236}">
-                <a16:creationId xmlns:a16="http://schemas.microsoft.com/office/drawing/2014/main" id="{846B119A-3797-FCB1-5185-C02E5974D563}"/>
-              </a:ext>
-            </a:extLst>
-          </p:cNvPr>
-          <p:cNvPicPr>
-            <a:picLocks noChangeAspect="1"/>
-          </p:cNvPicPr>
-          <p:nvPr/>
-        </p:nvPicPr>
-        <p:blipFill>
-          <a:blip r:embed="rId2"/>
-          <a:stretch>
-            <a:fillRect/>
-          </a:stretch>
-        </p:blipFill>
-        <p:spPr>
-          <a:xfrm>
-            <a:off x="6766623" y="3063686"/>
-            <a:ext cx="3504774" cy="3657789"/>
-          </a:xfrm>
-          <a:prstGeom prst="rect">
-            <a:avLst/>
-          </a:prstGeom>
-        </p:spPr>
-      </p:pic>
-      <p:sp>
-        <p:nvSpPr>
-          <p:cNvPr id="12" name="TextBox 11">
-            <a:extLst>
-              <a:ext uri="{FF2B5EF4-FFF2-40B4-BE49-F238E27FC236}">
-                <a16:creationId xmlns:a16="http://schemas.microsoft.com/office/drawing/2014/main" id="{8A6975D0-3FE8-F536-B4B4-C5293468EAA7}"/>
-              </a:ext>
-            </a:extLst>
-          </p:cNvPr>
-          <p:cNvSpPr txBox="1"/>
-          <p:nvPr/>
-        </p:nvSpPr>
-        <p:spPr>
-          <a:xfrm>
-            <a:off x="6410681" y="2700892"/>
-            <a:ext cx="4203831" cy="369332"/>
-          </a:xfrm>
-          <a:prstGeom prst="rect">
-            <a:avLst/>
-          </a:prstGeom>
-          <a:noFill/>
-        </p:spPr>
-        <p:txBody>
-          <a:bodyPr wrap="square" rtlCol="0" anchor="ctr">
-            <a:spAutoFit/>
-          </a:bodyPr>
-          <a:lstStyle/>
-          <a:p>
-            <a:pPr algn="ctr"/>
-            <a:r>
-              <a:rPr lang="ru-RU" b="1" dirty="0"/>
-              <a:t>Вывод:</a:t>
-            </a:r>
-          </a:p>
-        </p:txBody>
-      </p:sp>
-      <p:pic>
-        <p:nvPicPr>
-          <p:cNvPr id="3" name="Рисунок 2">
-            <a:extLst>
-              <a:ext uri="{FF2B5EF4-FFF2-40B4-BE49-F238E27FC236}">
-                <a16:creationId xmlns:a16="http://schemas.microsoft.com/office/drawing/2014/main" id="{BB9E41E4-1459-349F-BF41-1D590EEA2AE7}"/>
-              </a:ext>
-            </a:extLst>
-          </p:cNvPr>
-          <p:cNvPicPr>
-            <a:picLocks noChangeAspect="1"/>
-          </p:cNvPicPr>
-          <p:nvPr/>
-        </p:nvPicPr>
-        <p:blipFill>
-          <a:blip r:embed="rId3"/>
-          <a:stretch>
-            <a:fillRect/>
-          </a:stretch>
-        </p:blipFill>
-        <p:spPr>
-          <a:xfrm>
-            <a:off x="1577488" y="3184525"/>
-            <a:ext cx="4295775" cy="3171825"/>
-          </a:xfrm>
-          <a:prstGeom prst="rect">
-            <a:avLst/>
-          </a:prstGeom>
-        </p:spPr>
-      </p:pic>
     </p:spTree>
     <p:extLst>
       <p:ext uri="{BB962C8B-B14F-4D97-AF65-F5344CB8AC3E}">
-        <p14:creationId xmlns:p14="http://schemas.microsoft.com/office/powerpoint/2010/main" val="1074735894"/>
+        <p14:creationId xmlns:p14="http://schemas.microsoft.com/office/powerpoint/2010/main" val="954431682"/>
       </p:ext>
     </p:extLst>
   </p:cSld>
@@ -6574,8 +6694,8 @@
         </p:nvSpPr>
         <p:spPr>
           <a:xfrm>
-            <a:off x="1485899" y="350296"/>
-            <a:ext cx="9212778" cy="954107"/>
+            <a:off x="1485899" y="565739"/>
+            <a:ext cx="9212778" cy="523220"/>
           </a:xfrm>
           <a:prstGeom prst="rect">
             <a:avLst/>
@@ -6589,10 +6709,8 @@
           <a:lstStyle/>
           <a:p>
             <a:r>
-              <a:rPr lang="ru-RU" sz="2800" b="1" dirty="0">
-                <a:latin typeface="+mj-lt"/>
-              </a:rPr>
-              <a:t>Задание 1. Анализ распределения яркости изображения</a:t>
+              <a:rPr lang="ru-RU" sz="2800" b="1" dirty="0"/>
+              <a:t>Загрузка данных и предварительная обработка</a:t>
             </a:r>
           </a:p>
         </p:txBody>
@@ -6611,8 +6729,8 @@
         </p:nvSpPr>
         <p:spPr>
           <a:xfrm>
-            <a:off x="1485899" y="1540983"/>
-            <a:ext cx="9212779" cy="707886"/>
+            <a:off x="1485899" y="1387094"/>
+            <a:ext cx="9182101" cy="1015663"/>
           </a:xfrm>
           <a:prstGeom prst="rect">
             <a:avLst/>
@@ -6627,7 +6745,43 @@
           <a:p>
             <a:r>
               <a:rPr lang="ru-RU" sz="2000" dirty="0"/>
-              <a:t>Суть задания: Построить гистограмму изображения и определить минимум, максимум и медиану яркости.</a:t>
+              <a:t>Подготовить рабочие матрицы изображения: цветную 3-канальную для проекций и одноканальную полутоновую для яркостного, градиентного и порогового анализа.</a:t>
+            </a:r>
+          </a:p>
+        </p:txBody>
+      </p:sp>
+      <p:sp>
+        <p:nvSpPr>
+          <p:cNvPr id="21" name="TextBox 20">
+            <a:extLst>
+              <a:ext uri="{FF2B5EF4-FFF2-40B4-BE49-F238E27FC236}">
+                <a16:creationId xmlns:a16="http://schemas.microsoft.com/office/drawing/2014/main" id="{0C569071-A5F8-E7C9-1DC2-DF3EA9F88597}"/>
+              </a:ext>
+            </a:extLst>
+          </p:cNvPr>
+          <p:cNvSpPr txBox="1"/>
+          <p:nvPr/>
+        </p:nvSpPr>
+        <p:spPr>
+          <a:xfrm>
+            <a:off x="1577488" y="2700892"/>
+            <a:ext cx="4203831" cy="369332"/>
+          </a:xfrm>
+          <a:prstGeom prst="rect">
+            <a:avLst/>
+          </a:prstGeom>
+          <a:noFill/>
+        </p:spPr>
+        <p:txBody>
+          <a:bodyPr wrap="square" rtlCol="0" anchor="ctr">
+            <a:spAutoFit/>
+          </a:bodyPr>
+          <a:lstStyle/>
+          <a:p>
+            <a:pPr algn="ctr"/>
+            <a:r>
+              <a:rPr lang="ru-RU" b="1" dirty="0"/>
+              <a:t>Код:</a:t>
             </a:r>
           </a:p>
         </p:txBody>
@@ -6661,12 +6815,48 @@
           </a:p>
         </p:txBody>
       </p:sp>
+      <p:sp>
+        <p:nvSpPr>
+          <p:cNvPr id="12" name="TextBox 11">
+            <a:extLst>
+              <a:ext uri="{FF2B5EF4-FFF2-40B4-BE49-F238E27FC236}">
+                <a16:creationId xmlns:a16="http://schemas.microsoft.com/office/drawing/2014/main" id="{8A6975D0-3FE8-F536-B4B4-C5293468EAA7}"/>
+              </a:ext>
+            </a:extLst>
+          </p:cNvPr>
+          <p:cNvSpPr txBox="1"/>
+          <p:nvPr/>
+        </p:nvSpPr>
+        <p:spPr>
+          <a:xfrm>
+            <a:off x="6410681" y="2700892"/>
+            <a:ext cx="4203831" cy="369332"/>
+          </a:xfrm>
+          <a:prstGeom prst="rect">
+            <a:avLst/>
+          </a:prstGeom>
+          <a:noFill/>
+        </p:spPr>
+        <p:txBody>
+          <a:bodyPr wrap="square" rtlCol="0" anchor="ctr">
+            <a:spAutoFit/>
+          </a:bodyPr>
+          <a:lstStyle/>
+          <a:p>
+            <a:pPr algn="ctr"/>
+            <a:r>
+              <a:rPr lang="ru-RU" b="1" dirty="0"/>
+              <a:t>Вывод:</a:t>
+            </a:r>
+          </a:p>
+        </p:txBody>
+      </p:sp>
       <p:pic>
         <p:nvPicPr>
-          <p:cNvPr id="4" name="Рисунок 3">
-            <a:extLst>
-              <a:ext uri="{FF2B5EF4-FFF2-40B4-BE49-F238E27FC236}">
-                <a16:creationId xmlns:a16="http://schemas.microsoft.com/office/drawing/2014/main" id="{CD3A2F61-C57C-9D7C-9784-4944BAE5176B}"/>
+          <p:cNvPr id="3" name="Рисунок 2">
+            <a:extLst>
+              <a:ext uri="{FF2B5EF4-FFF2-40B4-BE49-F238E27FC236}">
+                <a16:creationId xmlns:a16="http://schemas.microsoft.com/office/drawing/2014/main" id="{BB9E41E4-1459-349F-BF41-1D590EEA2AE7}"/>
               </a:ext>
             </a:extLst>
           </p:cNvPr>
@@ -6683,8 +6873,38 @@
         </p:blipFill>
         <p:spPr>
           <a:xfrm>
-            <a:off x="4201019" y="2386256"/>
-            <a:ext cx="3789961" cy="4445752"/>
+            <a:off x="1577488" y="3184525"/>
+            <a:ext cx="4295775" cy="3171825"/>
+          </a:xfrm>
+          <a:prstGeom prst="rect">
+            <a:avLst/>
+          </a:prstGeom>
+        </p:spPr>
+      </p:pic>
+      <p:pic>
+        <p:nvPicPr>
+          <p:cNvPr id="6" name="Рисунок 5">
+            <a:extLst>
+              <a:ext uri="{FF2B5EF4-FFF2-40B4-BE49-F238E27FC236}">
+                <a16:creationId xmlns:a16="http://schemas.microsoft.com/office/drawing/2014/main" id="{34DDF920-6EE6-4DDB-C430-BC12D8C2F4F3}"/>
+              </a:ext>
+            </a:extLst>
+          </p:cNvPr>
+          <p:cNvPicPr>
+            <a:picLocks noChangeAspect="1"/>
+          </p:cNvPicPr>
+          <p:nvPr/>
+        </p:nvPicPr>
+        <p:blipFill>
+          <a:blip r:embed="rId3"/>
+          <a:stretch>
+            <a:fillRect/>
+          </a:stretch>
+        </p:blipFill>
+        <p:spPr>
+          <a:xfrm>
+            <a:off x="6815137" y="3070224"/>
+            <a:ext cx="3590925" cy="3686175"/>
           </a:xfrm>
           <a:prstGeom prst="rect">
             <a:avLst/>
@@ -6694,7 +6914,7 @@
     </p:spTree>
     <p:extLst>
       <p:ext uri="{BB962C8B-B14F-4D97-AF65-F5344CB8AC3E}">
-        <p14:creationId xmlns:p14="http://schemas.microsoft.com/office/powerpoint/2010/main" val="2034063058"/>
+        <p14:creationId xmlns:p14="http://schemas.microsoft.com/office/powerpoint/2010/main" val="1074735894"/>
       </p:ext>
     </p:extLst>
   </p:cSld>
@@ -6721,149 +6941,12 @@
           <a:chExt cx="0" cy="0"/>
         </a:xfrm>
       </p:grpSpPr>
-      <p:sp>
-        <p:nvSpPr>
-          <p:cNvPr id="5" name="TextBox 4">
-            <a:extLst>
-              <a:ext uri="{FF2B5EF4-FFF2-40B4-BE49-F238E27FC236}">
-                <a16:creationId xmlns:a16="http://schemas.microsoft.com/office/drawing/2014/main" id="{B41B6E55-C1E7-22C7-FFCB-604BB72C480D}"/>
-              </a:ext>
-            </a:extLst>
-          </p:cNvPr>
-          <p:cNvSpPr txBox="1"/>
-          <p:nvPr/>
-        </p:nvSpPr>
-        <p:spPr>
-          <a:xfrm>
-            <a:off x="1485899" y="350296"/>
-            <a:ext cx="9212778" cy="954107"/>
-          </a:xfrm>
-          <a:prstGeom prst="rect">
-            <a:avLst/>
-          </a:prstGeom>
-          <a:noFill/>
-        </p:spPr>
-        <p:txBody>
-          <a:bodyPr wrap="square" rtlCol="0" anchor="ctr">
-            <a:spAutoFit/>
-          </a:bodyPr>
-          <a:lstStyle/>
-          <a:p>
-            <a:r>
-              <a:rPr lang="ru-RU" sz="2800" b="1" dirty="0">
-                <a:latin typeface="+mj-lt"/>
-              </a:rPr>
-              <a:t>Задание 1. Анализ распределения яркости изображения</a:t>
-            </a:r>
-          </a:p>
-        </p:txBody>
-      </p:sp>
-      <p:sp>
-        <p:nvSpPr>
-          <p:cNvPr id="20" name="TextBox 19">
-            <a:extLst>
-              <a:ext uri="{FF2B5EF4-FFF2-40B4-BE49-F238E27FC236}">
-                <a16:creationId xmlns:a16="http://schemas.microsoft.com/office/drawing/2014/main" id="{71F5B869-FCA3-91D3-678D-F5E5BE3D9772}"/>
-              </a:ext>
-            </a:extLst>
-          </p:cNvPr>
-          <p:cNvSpPr txBox="1"/>
-          <p:nvPr/>
-        </p:nvSpPr>
-        <p:spPr>
-          <a:xfrm>
-            <a:off x="1485899" y="1540983"/>
-            <a:ext cx="9212779" cy="707886"/>
-          </a:xfrm>
-          <a:prstGeom prst="rect">
-            <a:avLst/>
-          </a:prstGeom>
-          <a:noFill/>
-        </p:spPr>
-        <p:txBody>
-          <a:bodyPr wrap="square" rtlCol="0" anchor="ctr">
-            <a:spAutoFit/>
-          </a:bodyPr>
-          <a:lstStyle/>
-          <a:p>
-            <a:r>
-              <a:rPr lang="ru-RU" sz="2000" dirty="0"/>
-              <a:t>Суть задания: Построить гистограмму изображения и определить минимум, максимум и медиану яркости.</a:t>
-            </a:r>
-          </a:p>
-        </p:txBody>
-      </p:sp>
-      <p:sp>
-        <p:nvSpPr>
-          <p:cNvPr id="28" name="TextBox 27">
-            <a:extLst>
-              <a:ext uri="{FF2B5EF4-FFF2-40B4-BE49-F238E27FC236}">
-                <a16:creationId xmlns:a16="http://schemas.microsoft.com/office/drawing/2014/main" id="{7652C659-39B1-B693-6C90-EC889EECEA23}"/>
-              </a:ext>
-            </a:extLst>
-          </p:cNvPr>
-          <p:cNvSpPr txBox="1"/>
-          <p:nvPr/>
-        </p:nvSpPr>
-        <p:spPr>
-          <a:xfrm>
-            <a:off x="3783528" y="2608818"/>
-            <a:ext cx="4610100" cy="369332"/>
-          </a:xfrm>
-          <a:prstGeom prst="rect">
-            <a:avLst/>
-          </a:prstGeom>
-          <a:noFill/>
-        </p:spPr>
-        <p:txBody>
-          <a:bodyPr wrap="square" rtlCol="0" anchor="ctr">
-            <a:spAutoFit/>
-          </a:bodyPr>
-          <a:lstStyle/>
-          <a:p>
-            <a:pPr algn="ctr"/>
-            <a:r>
-              <a:rPr lang="ru-RU" b="1" dirty="0"/>
-              <a:t>Вывод:</a:t>
-            </a:r>
-          </a:p>
-        </p:txBody>
-      </p:sp>
-      <p:sp>
-        <p:nvSpPr>
-          <p:cNvPr id="7" name="Номер слайда 6">
-            <a:extLst>
-              <a:ext uri="{FF2B5EF4-FFF2-40B4-BE49-F238E27FC236}">
-                <a16:creationId xmlns:a16="http://schemas.microsoft.com/office/drawing/2014/main" id="{D024ECB0-4347-288D-3116-357235DC7F95}"/>
-              </a:ext>
-            </a:extLst>
-          </p:cNvPr>
-          <p:cNvSpPr>
-            <a:spLocks noGrp="1"/>
-          </p:cNvSpPr>
-          <p:nvPr>
-            <p:ph type="sldNum" sz="quarter" idx="12"/>
-          </p:nvPr>
-        </p:nvSpPr>
-        <p:spPr/>
-        <p:txBody>
-          <a:bodyPr/>
-          <a:lstStyle/>
-          <a:p>
-            <a:fld id="{89A371D6-626E-4711-87E0-599E0F8A4C97}" type="slidenum">
-              <a:rPr lang="ru-RU" smtClean="0"/>
-              <a:t>5</a:t>
-            </a:fld>
-            <a:endParaRPr lang="ru-RU"/>
-          </a:p>
-        </p:txBody>
-      </p:sp>
       <p:pic>
         <p:nvPicPr>
-          <p:cNvPr id="4" name="Рисунок 3">
-            <a:extLst>
-              <a:ext uri="{FF2B5EF4-FFF2-40B4-BE49-F238E27FC236}">
-                <a16:creationId xmlns:a16="http://schemas.microsoft.com/office/drawing/2014/main" id="{D65A48CF-808B-F3BA-12E7-27BF7F7C6B3B}"/>
+          <p:cNvPr id="13" name="Рисунок 12">
+            <a:extLst>
+              <a:ext uri="{FF2B5EF4-FFF2-40B4-BE49-F238E27FC236}">
+                <a16:creationId xmlns:a16="http://schemas.microsoft.com/office/drawing/2014/main" id="{0AF131A3-F280-6FA9-7F99-F716D5180095}"/>
               </a:ext>
             </a:extLst>
           </p:cNvPr>
@@ -6880,8 +6963,139 @@
         </p:blipFill>
         <p:spPr>
           <a:xfrm>
-            <a:off x="912424" y="3060520"/>
-            <a:ext cx="10039350" cy="3714750"/>
+            <a:off x="3581400" y="2485449"/>
+            <a:ext cx="8403565" cy="4124325"/>
+          </a:xfrm>
+          <a:prstGeom prst="rect">
+            <a:avLst/>
+          </a:prstGeom>
+        </p:spPr>
+      </p:pic>
+      <p:sp>
+        <p:nvSpPr>
+          <p:cNvPr id="5" name="TextBox 4">
+            <a:extLst>
+              <a:ext uri="{FF2B5EF4-FFF2-40B4-BE49-F238E27FC236}">
+                <a16:creationId xmlns:a16="http://schemas.microsoft.com/office/drawing/2014/main" id="{B41B6E55-C1E7-22C7-FFCB-604BB72C480D}"/>
+              </a:ext>
+            </a:extLst>
+          </p:cNvPr>
+          <p:cNvSpPr txBox="1"/>
+          <p:nvPr/>
+        </p:nvSpPr>
+        <p:spPr>
+          <a:xfrm>
+            <a:off x="1485899" y="350296"/>
+            <a:ext cx="9212778" cy="954107"/>
+          </a:xfrm>
+          <a:prstGeom prst="rect">
+            <a:avLst/>
+          </a:prstGeom>
+          <a:noFill/>
+        </p:spPr>
+        <p:txBody>
+          <a:bodyPr wrap="square" rtlCol="0" anchor="ctr">
+            <a:spAutoFit/>
+          </a:bodyPr>
+          <a:lstStyle/>
+          <a:p>
+            <a:r>
+              <a:rPr lang="ru-RU" sz="2800" b="1" dirty="0">
+                <a:latin typeface="+mj-lt"/>
+              </a:rPr>
+              <a:t>Задание 1. Анализ распределения яркости изображения</a:t>
+            </a:r>
+          </a:p>
+        </p:txBody>
+      </p:sp>
+      <p:sp>
+        <p:nvSpPr>
+          <p:cNvPr id="20" name="TextBox 19">
+            <a:extLst>
+              <a:ext uri="{FF2B5EF4-FFF2-40B4-BE49-F238E27FC236}">
+                <a16:creationId xmlns:a16="http://schemas.microsoft.com/office/drawing/2014/main" id="{71F5B869-FCA3-91D3-678D-F5E5BE3D9772}"/>
+              </a:ext>
+            </a:extLst>
+          </p:cNvPr>
+          <p:cNvSpPr txBox="1"/>
+          <p:nvPr/>
+        </p:nvSpPr>
+        <p:spPr>
+          <a:xfrm>
+            <a:off x="1485899" y="1540983"/>
+            <a:ext cx="9212779" cy="707886"/>
+          </a:xfrm>
+          <a:prstGeom prst="rect">
+            <a:avLst/>
+          </a:prstGeom>
+          <a:noFill/>
+        </p:spPr>
+        <p:txBody>
+          <a:bodyPr wrap="square" rtlCol="0" anchor="ctr">
+            <a:spAutoFit/>
+          </a:bodyPr>
+          <a:lstStyle/>
+          <a:p>
+            <a:r>
+              <a:rPr lang="ru-RU" sz="2000" dirty="0"/>
+              <a:t>Суть задания: Построить гистограмму изображения и определить минимум, максимум и медиану яркости.</a:t>
+            </a:r>
+          </a:p>
+        </p:txBody>
+      </p:sp>
+      <p:sp>
+        <p:nvSpPr>
+          <p:cNvPr id="7" name="Номер слайда 6">
+            <a:extLst>
+              <a:ext uri="{FF2B5EF4-FFF2-40B4-BE49-F238E27FC236}">
+                <a16:creationId xmlns:a16="http://schemas.microsoft.com/office/drawing/2014/main" id="{D024ECB0-4347-288D-3116-357235DC7F95}"/>
+              </a:ext>
+            </a:extLst>
+          </p:cNvPr>
+          <p:cNvSpPr>
+            <a:spLocks noGrp="1"/>
+          </p:cNvSpPr>
+          <p:nvPr>
+            <p:ph type="sldNum" sz="quarter" idx="12"/>
+          </p:nvPr>
+        </p:nvSpPr>
+        <p:spPr/>
+        <p:txBody>
+          <a:bodyPr/>
+          <a:lstStyle/>
+          <a:p>
+            <a:fld id="{89A371D6-626E-4711-87E0-599E0F8A4C97}" type="slidenum">
+              <a:rPr lang="ru-RU" smtClean="0"/>
+              <a:t>5</a:t>
+            </a:fld>
+            <a:endParaRPr lang="ru-RU"/>
+          </a:p>
+        </p:txBody>
+      </p:sp>
+      <p:pic>
+        <p:nvPicPr>
+          <p:cNvPr id="11" name="Рисунок 10">
+            <a:extLst>
+              <a:ext uri="{FF2B5EF4-FFF2-40B4-BE49-F238E27FC236}">
+                <a16:creationId xmlns:a16="http://schemas.microsoft.com/office/drawing/2014/main" id="{9A6B45B3-B477-97EC-A0A9-BE0AB74A9476}"/>
+              </a:ext>
+            </a:extLst>
+          </p:cNvPr>
+          <p:cNvPicPr>
+            <a:picLocks noChangeAspect="1"/>
+          </p:cNvPicPr>
+          <p:nvPr/>
+        </p:nvPicPr>
+        <p:blipFill>
+          <a:blip r:embed="rId3"/>
+          <a:stretch>
+            <a:fillRect/>
+          </a:stretch>
+        </p:blipFill>
+        <p:spPr>
+          <a:xfrm>
+            <a:off x="207034" y="2530864"/>
+            <a:ext cx="3281051" cy="3368082"/>
           </a:xfrm>
           <a:prstGeom prst="rect">
             <a:avLst/>
@@ -6932,7 +7146,7 @@
         </p:nvSpPr>
         <p:spPr>
           <a:xfrm>
-            <a:off x="1489609" y="137169"/>
+            <a:off x="1485899" y="350296"/>
             <a:ext cx="9212778" cy="954107"/>
           </a:xfrm>
           <a:prstGeom prst="rect">
@@ -6950,19 +7164,7 @@
               <a:rPr lang="ru-RU" sz="2800" b="1" dirty="0">
                 <a:latin typeface="+mj-lt"/>
               </a:rPr>
-              <a:t>Задание 2. Градиентные профили (Фильтр </a:t>
-            </a:r>
-            <a:r>
-              <a:rPr lang="ru-RU" sz="2800" b="1" dirty="0" err="1">
-                <a:latin typeface="+mj-lt"/>
-              </a:rPr>
-              <a:t>Собеля</a:t>
-            </a:r>
-            <a:r>
-              <a:rPr lang="ru-RU" sz="2800" b="1" dirty="0">
-                <a:latin typeface="+mj-lt"/>
-              </a:rPr>
-              <a:t> по X и Y)</a:t>
+              <a:t>Задание 1. Анализ распределения яркости изображения</a:t>
             </a:r>
           </a:p>
         </p:txBody>
@@ -6981,7 +7183,7 @@
         </p:nvSpPr>
         <p:spPr>
           <a:xfrm>
-            <a:off x="1489608" y="1336088"/>
+            <a:off x="1485899" y="1540983"/>
             <a:ext cx="9212779" cy="707886"/>
           </a:xfrm>
           <a:prstGeom prst="rect">
@@ -6997,61 +7199,17 @@
           <a:p>
             <a:r>
               <a:rPr lang="ru-RU" sz="2000" dirty="0"/>
-              <a:t>Суть задания: Построить профили изображения после применения фильтра «</a:t>
-            </a:r>
-            <a:r>
-              <a:rPr lang="ru-RU" sz="2000" dirty="0" err="1"/>
-              <a:t>Собель</a:t>
-            </a:r>
-            <a:r>
-              <a:rPr lang="ru-RU" sz="2000" dirty="0"/>
-              <a:t>» по X и Y.</a:t>
-            </a:r>
-          </a:p>
-        </p:txBody>
-      </p:sp>
-      <p:sp>
-        <p:nvSpPr>
-          <p:cNvPr id="21" name="TextBox 20">
-            <a:extLst>
-              <a:ext uri="{FF2B5EF4-FFF2-40B4-BE49-F238E27FC236}">
-                <a16:creationId xmlns:a16="http://schemas.microsoft.com/office/drawing/2014/main" id="{0C569071-A5F8-E7C9-1DC2-DF3EA9F88597}"/>
-              </a:ext>
-            </a:extLst>
-          </p:cNvPr>
-          <p:cNvSpPr txBox="1"/>
-          <p:nvPr/>
-        </p:nvSpPr>
-        <p:spPr>
-          <a:xfrm>
-            <a:off x="4009098" y="2045472"/>
-            <a:ext cx="4173803" cy="369332"/>
-          </a:xfrm>
-          <a:prstGeom prst="rect">
-            <a:avLst/>
-          </a:prstGeom>
-          <a:noFill/>
-        </p:spPr>
-        <p:txBody>
-          <a:bodyPr wrap="square" rtlCol="0" anchor="ctr">
-            <a:spAutoFit/>
-          </a:bodyPr>
-          <a:lstStyle/>
-          <a:p>
-            <a:pPr algn="ctr"/>
-            <a:r>
-              <a:rPr lang="ru-RU" b="1" dirty="0"/>
-              <a:t>Код:</a:t>
-            </a:r>
-          </a:p>
-        </p:txBody>
-      </p:sp>
-      <p:sp>
-        <p:nvSpPr>
-          <p:cNvPr id="14" name="Номер слайда 13">
-            <a:extLst>
-              <a:ext uri="{FF2B5EF4-FFF2-40B4-BE49-F238E27FC236}">
-                <a16:creationId xmlns:a16="http://schemas.microsoft.com/office/drawing/2014/main" id="{E68AB01A-8F4E-E197-5EE4-ADA4BA8CC9A1}"/>
+              <a:t>Суть задания: Построить гистограмму изображения и определить минимум, максимум и медиану яркости.</a:t>
+            </a:r>
+          </a:p>
+        </p:txBody>
+      </p:sp>
+      <p:sp>
+        <p:nvSpPr>
+          <p:cNvPr id="7" name="Номер слайда 6">
+            <a:extLst>
+              <a:ext uri="{FF2B5EF4-FFF2-40B4-BE49-F238E27FC236}">
+                <a16:creationId xmlns:a16="http://schemas.microsoft.com/office/drawing/2014/main" id="{D024ECB0-4347-288D-3116-357235DC7F95}"/>
               </a:ext>
             </a:extLst>
           </p:cNvPr>
@@ -7077,10 +7235,10 @@
       </p:sp>
       <p:pic>
         <p:nvPicPr>
-          <p:cNvPr id="4" name="Рисунок 3">
-            <a:extLst>
-              <a:ext uri="{FF2B5EF4-FFF2-40B4-BE49-F238E27FC236}">
-                <a16:creationId xmlns:a16="http://schemas.microsoft.com/office/drawing/2014/main" id="{02944396-69D4-932C-8309-DE4F20384B76}"/>
+          <p:cNvPr id="9" name="Рисунок 8">
+            <a:extLst>
+              <a:ext uri="{FF2B5EF4-FFF2-40B4-BE49-F238E27FC236}">
+                <a16:creationId xmlns:a16="http://schemas.microsoft.com/office/drawing/2014/main" id="{5CE58225-5E34-0BC6-C874-7D617848BE1A}"/>
               </a:ext>
             </a:extLst>
           </p:cNvPr>
@@ -7097,8 +7255,8 @@
         </p:blipFill>
         <p:spPr>
           <a:xfrm>
-            <a:off x="1379238" y="2613025"/>
-            <a:ext cx="4257675" cy="3743325"/>
+            <a:off x="6849253" y="3661760"/>
+            <a:ext cx="3417438" cy="954107"/>
           </a:xfrm>
           <a:prstGeom prst="rect">
             <a:avLst/>
@@ -7107,10 +7265,10 @@
       </p:pic>
       <p:pic>
         <p:nvPicPr>
-          <p:cNvPr id="7" name="Рисунок 6">
-            <a:extLst>
-              <a:ext uri="{FF2B5EF4-FFF2-40B4-BE49-F238E27FC236}">
-                <a16:creationId xmlns:a16="http://schemas.microsoft.com/office/drawing/2014/main" id="{1DDF10CE-5E4D-B6FE-824F-C2763B14AE11}"/>
+          <p:cNvPr id="12" name="Рисунок 11">
+            <a:extLst>
+              <a:ext uri="{FF2B5EF4-FFF2-40B4-BE49-F238E27FC236}">
+                <a16:creationId xmlns:a16="http://schemas.microsoft.com/office/drawing/2014/main" id="{A35C8B5E-4F8B-ED3A-D791-3D8C544C672A}"/>
               </a:ext>
             </a:extLst>
           </p:cNvPr>
@@ -7127,8 +7285,8 @@
         </p:blipFill>
         <p:spPr>
           <a:xfrm>
-            <a:off x="5966693" y="2609487"/>
-            <a:ext cx="4295775" cy="3181350"/>
+            <a:off x="1399869" y="2248869"/>
+            <a:ext cx="4363064" cy="4603784"/>
           </a:xfrm>
           <a:prstGeom prst="rect">
             <a:avLst/>
@@ -7138,7 +7296,7 @@
     </p:spTree>
     <p:extLst>
       <p:ext uri="{BB962C8B-B14F-4D97-AF65-F5344CB8AC3E}">
-        <p14:creationId xmlns:p14="http://schemas.microsoft.com/office/powerpoint/2010/main" val="2412595500"/>
+        <p14:creationId xmlns:p14="http://schemas.microsoft.com/office/powerpoint/2010/main" val="2034063058"/>
       </p:ext>
     </p:extLst>
   </p:cSld>
@@ -7165,163 +7323,6 @@
           <a:chExt cx="0" cy="0"/>
         </a:xfrm>
       </p:grpSpPr>
-      <p:sp>
-        <p:nvSpPr>
-          <p:cNvPr id="5" name="TextBox 4">
-            <a:extLst>
-              <a:ext uri="{FF2B5EF4-FFF2-40B4-BE49-F238E27FC236}">
-                <a16:creationId xmlns:a16="http://schemas.microsoft.com/office/drawing/2014/main" id="{B41B6E55-C1E7-22C7-FFCB-604BB72C480D}"/>
-              </a:ext>
-            </a:extLst>
-          </p:cNvPr>
-          <p:cNvSpPr txBox="1"/>
-          <p:nvPr/>
-        </p:nvSpPr>
-        <p:spPr>
-          <a:xfrm>
-            <a:off x="1489609" y="137169"/>
-            <a:ext cx="9212778" cy="954107"/>
-          </a:xfrm>
-          <a:prstGeom prst="rect">
-            <a:avLst/>
-          </a:prstGeom>
-          <a:noFill/>
-        </p:spPr>
-        <p:txBody>
-          <a:bodyPr wrap="square" rtlCol="0" anchor="ctr">
-            <a:spAutoFit/>
-          </a:bodyPr>
-          <a:lstStyle/>
-          <a:p>
-            <a:r>
-              <a:rPr lang="ru-RU" sz="2800" b="1" dirty="0">
-                <a:latin typeface="+mj-lt"/>
-              </a:rPr>
-              <a:t>Задание 2. Градиентные профили (Фильтр </a:t>
-            </a:r>
-            <a:r>
-              <a:rPr lang="ru-RU" sz="2800" b="1" dirty="0" err="1">
-                <a:latin typeface="+mj-lt"/>
-              </a:rPr>
-              <a:t>Собеля</a:t>
-            </a:r>
-            <a:r>
-              <a:rPr lang="ru-RU" sz="2800" b="1" dirty="0">
-                <a:latin typeface="+mj-lt"/>
-              </a:rPr>
-              <a:t> по X и Y)</a:t>
-            </a:r>
-          </a:p>
-        </p:txBody>
-      </p:sp>
-      <p:sp>
-        <p:nvSpPr>
-          <p:cNvPr id="20" name="TextBox 19">
-            <a:extLst>
-              <a:ext uri="{FF2B5EF4-FFF2-40B4-BE49-F238E27FC236}">
-                <a16:creationId xmlns:a16="http://schemas.microsoft.com/office/drawing/2014/main" id="{71F5B869-FCA3-91D3-678D-F5E5BE3D9772}"/>
-              </a:ext>
-            </a:extLst>
-          </p:cNvPr>
-          <p:cNvSpPr txBox="1"/>
-          <p:nvPr/>
-        </p:nvSpPr>
-        <p:spPr>
-          <a:xfrm>
-            <a:off x="1489608" y="1336088"/>
-            <a:ext cx="9212779" cy="707886"/>
-          </a:xfrm>
-          <a:prstGeom prst="rect">
-            <a:avLst/>
-          </a:prstGeom>
-          <a:noFill/>
-        </p:spPr>
-        <p:txBody>
-          <a:bodyPr wrap="square" rtlCol="0" anchor="ctr">
-            <a:spAutoFit/>
-          </a:bodyPr>
-          <a:lstStyle/>
-          <a:p>
-            <a:r>
-              <a:rPr lang="ru-RU" sz="2000" dirty="0"/>
-              <a:t>Суть задания: Построить профили изображения после применения фильтра «</a:t>
-            </a:r>
-            <a:r>
-              <a:rPr lang="ru-RU" sz="2000" dirty="0" err="1"/>
-              <a:t>Собель</a:t>
-            </a:r>
-            <a:r>
-              <a:rPr lang="ru-RU" sz="2000" dirty="0"/>
-              <a:t>» по X и Y.</a:t>
-            </a:r>
-          </a:p>
-        </p:txBody>
-      </p:sp>
-      <p:sp>
-        <p:nvSpPr>
-          <p:cNvPr id="21" name="TextBox 20">
-            <a:extLst>
-              <a:ext uri="{FF2B5EF4-FFF2-40B4-BE49-F238E27FC236}">
-                <a16:creationId xmlns:a16="http://schemas.microsoft.com/office/drawing/2014/main" id="{0C569071-A5F8-E7C9-1DC2-DF3EA9F88597}"/>
-              </a:ext>
-            </a:extLst>
-          </p:cNvPr>
-          <p:cNvSpPr txBox="1"/>
-          <p:nvPr/>
-        </p:nvSpPr>
-        <p:spPr>
-          <a:xfrm>
-            <a:off x="4009098" y="2045472"/>
-            <a:ext cx="4173803" cy="369332"/>
-          </a:xfrm>
-          <a:prstGeom prst="rect">
-            <a:avLst/>
-          </a:prstGeom>
-          <a:noFill/>
-        </p:spPr>
-        <p:txBody>
-          <a:bodyPr wrap="square" rtlCol="0" anchor="ctr">
-            <a:spAutoFit/>
-          </a:bodyPr>
-          <a:lstStyle/>
-          <a:p>
-            <a:pPr algn="ctr"/>
-            <a:r>
-              <a:rPr lang="ru-RU" b="1" dirty="0"/>
-              <a:t>Вывод:</a:t>
-            </a:r>
-          </a:p>
-        </p:txBody>
-      </p:sp>
-      <p:sp>
-        <p:nvSpPr>
-          <p:cNvPr id="14" name="Номер слайда 13">
-            <a:extLst>
-              <a:ext uri="{FF2B5EF4-FFF2-40B4-BE49-F238E27FC236}">
-                <a16:creationId xmlns:a16="http://schemas.microsoft.com/office/drawing/2014/main" id="{E68AB01A-8F4E-E197-5EE4-ADA4BA8CC9A1}"/>
-              </a:ext>
-            </a:extLst>
-          </p:cNvPr>
-          <p:cNvSpPr>
-            <a:spLocks noGrp="1"/>
-          </p:cNvSpPr>
-          <p:nvPr>
-            <p:ph type="sldNum" sz="quarter" idx="12"/>
-          </p:nvPr>
-        </p:nvSpPr>
-        <p:spPr/>
-        <p:txBody>
-          <a:bodyPr/>
-          <a:lstStyle/>
-          <a:p>
-            <a:fld id="{89A371D6-626E-4711-87E0-599E0F8A4C97}" type="slidenum">
-              <a:rPr lang="ru-RU" smtClean="0"/>
-              <a:t>7</a:t>
-            </a:fld>
-            <a:endParaRPr lang="ru-RU"/>
-          </a:p>
-        </p:txBody>
-      </p:sp>
       <p:pic>
         <p:nvPicPr>
           <p:cNvPr id="3" name="Рисунок 2">
@@ -7344,8 +7345,159 @@
         </p:blipFill>
         <p:spPr>
           <a:xfrm>
-            <a:off x="2152108" y="2414804"/>
+            <a:off x="3739367" y="2167887"/>
             <a:ext cx="7887778" cy="4371025"/>
+          </a:xfrm>
+          <a:prstGeom prst="rect">
+            <a:avLst/>
+          </a:prstGeom>
+        </p:spPr>
+      </p:pic>
+      <p:sp>
+        <p:nvSpPr>
+          <p:cNvPr id="5" name="TextBox 4">
+            <a:extLst>
+              <a:ext uri="{FF2B5EF4-FFF2-40B4-BE49-F238E27FC236}">
+                <a16:creationId xmlns:a16="http://schemas.microsoft.com/office/drawing/2014/main" id="{B41B6E55-C1E7-22C7-FFCB-604BB72C480D}"/>
+              </a:ext>
+            </a:extLst>
+          </p:cNvPr>
+          <p:cNvSpPr txBox="1"/>
+          <p:nvPr/>
+        </p:nvSpPr>
+        <p:spPr>
+          <a:xfrm>
+            <a:off x="1489609" y="137169"/>
+            <a:ext cx="9212778" cy="954107"/>
+          </a:xfrm>
+          <a:prstGeom prst="rect">
+            <a:avLst/>
+          </a:prstGeom>
+          <a:noFill/>
+        </p:spPr>
+        <p:txBody>
+          <a:bodyPr wrap="square" rtlCol="0" anchor="ctr">
+            <a:spAutoFit/>
+          </a:bodyPr>
+          <a:lstStyle/>
+          <a:p>
+            <a:r>
+              <a:rPr lang="ru-RU" sz="2800" b="1" dirty="0">
+                <a:latin typeface="+mj-lt"/>
+              </a:rPr>
+              <a:t>Задание 2. Градиентные профили (Фильтр </a:t>
+            </a:r>
+            <a:r>
+              <a:rPr lang="ru-RU" sz="2800" b="1" dirty="0" err="1">
+                <a:latin typeface="+mj-lt"/>
+              </a:rPr>
+              <a:t>Собеля</a:t>
+            </a:r>
+            <a:r>
+              <a:rPr lang="ru-RU" sz="2800" b="1" dirty="0">
+                <a:latin typeface="+mj-lt"/>
+              </a:rPr>
+              <a:t> по X и Y)</a:t>
+            </a:r>
+          </a:p>
+        </p:txBody>
+      </p:sp>
+      <p:sp>
+        <p:nvSpPr>
+          <p:cNvPr id="20" name="TextBox 19">
+            <a:extLst>
+              <a:ext uri="{FF2B5EF4-FFF2-40B4-BE49-F238E27FC236}">
+                <a16:creationId xmlns:a16="http://schemas.microsoft.com/office/drawing/2014/main" id="{71F5B869-FCA3-91D3-678D-F5E5BE3D9772}"/>
+              </a:ext>
+            </a:extLst>
+          </p:cNvPr>
+          <p:cNvSpPr txBox="1"/>
+          <p:nvPr/>
+        </p:nvSpPr>
+        <p:spPr>
+          <a:xfrm>
+            <a:off x="1489608" y="1336088"/>
+            <a:ext cx="9212779" cy="707886"/>
+          </a:xfrm>
+          <a:prstGeom prst="rect">
+            <a:avLst/>
+          </a:prstGeom>
+          <a:noFill/>
+        </p:spPr>
+        <p:txBody>
+          <a:bodyPr wrap="square" rtlCol="0" anchor="ctr">
+            <a:spAutoFit/>
+          </a:bodyPr>
+          <a:lstStyle/>
+          <a:p>
+            <a:r>
+              <a:rPr lang="ru-RU" sz="2000" dirty="0"/>
+              <a:t>Суть задания: Построить профили изображения после применения фильтра «</a:t>
+            </a:r>
+            <a:r>
+              <a:rPr lang="ru-RU" sz="2000" dirty="0" err="1"/>
+              <a:t>Собель</a:t>
+            </a:r>
+            <a:r>
+              <a:rPr lang="ru-RU" sz="2000" dirty="0"/>
+              <a:t>» по X и Y.</a:t>
+            </a:r>
+          </a:p>
+        </p:txBody>
+      </p:sp>
+      <p:sp>
+        <p:nvSpPr>
+          <p:cNvPr id="14" name="Номер слайда 13">
+            <a:extLst>
+              <a:ext uri="{FF2B5EF4-FFF2-40B4-BE49-F238E27FC236}">
+                <a16:creationId xmlns:a16="http://schemas.microsoft.com/office/drawing/2014/main" id="{E68AB01A-8F4E-E197-5EE4-ADA4BA8CC9A1}"/>
+              </a:ext>
+            </a:extLst>
+          </p:cNvPr>
+          <p:cNvSpPr>
+            <a:spLocks noGrp="1"/>
+          </p:cNvSpPr>
+          <p:nvPr>
+            <p:ph type="sldNum" sz="quarter" idx="12"/>
+          </p:nvPr>
+        </p:nvSpPr>
+        <p:spPr/>
+        <p:txBody>
+          <a:bodyPr/>
+          <a:lstStyle/>
+          <a:p>
+            <a:fld id="{89A371D6-626E-4711-87E0-599E0F8A4C97}" type="slidenum">
+              <a:rPr lang="ru-RU" smtClean="0"/>
+              <a:t>7</a:t>
+            </a:fld>
+            <a:endParaRPr lang="ru-RU"/>
+          </a:p>
+        </p:txBody>
+      </p:sp>
+      <p:pic>
+        <p:nvPicPr>
+          <p:cNvPr id="8" name="Рисунок 7">
+            <a:extLst>
+              <a:ext uri="{FF2B5EF4-FFF2-40B4-BE49-F238E27FC236}">
+                <a16:creationId xmlns:a16="http://schemas.microsoft.com/office/drawing/2014/main" id="{C0E98B2E-4C4E-CE77-BD45-D5403CB95968}"/>
+              </a:ext>
+            </a:extLst>
+          </p:cNvPr>
+          <p:cNvPicPr>
+            <a:picLocks noChangeAspect="1"/>
+          </p:cNvPicPr>
+          <p:nvPr/>
+        </p:nvPicPr>
+        <p:blipFill>
+          <a:blip r:embed="rId3"/>
+          <a:stretch>
+            <a:fillRect/>
+          </a:stretch>
+        </p:blipFill>
+        <p:spPr>
+          <a:xfrm>
+            <a:off x="148442" y="2510311"/>
+            <a:ext cx="3590925" cy="3686175"/>
           </a:xfrm>
           <a:prstGeom prst="rect">
             <a:avLst/>
@@ -7396,8 +7548,8 @@
         </p:nvSpPr>
         <p:spPr>
           <a:xfrm>
-            <a:off x="1482190" y="549275"/>
-            <a:ext cx="9185810" cy="954107"/>
+            <a:off x="1489609" y="137169"/>
+            <a:ext cx="9212778" cy="954107"/>
           </a:xfrm>
           <a:prstGeom prst="rect">
             <a:avLst/>
@@ -7414,17 +7566,29 @@
               <a:rPr lang="ru-RU" sz="2800" b="1" dirty="0">
                 <a:latin typeface="+mj-lt"/>
               </a:rPr>
-              <a:t>Задание 3. Интегральные проекции цветного изображения</a:t>
-            </a:r>
-          </a:p>
-        </p:txBody>
-      </p:sp>
-      <p:sp>
-        <p:nvSpPr>
-          <p:cNvPr id="21" name="TextBox 20">
-            <a:extLst>
-              <a:ext uri="{FF2B5EF4-FFF2-40B4-BE49-F238E27FC236}">
-                <a16:creationId xmlns:a16="http://schemas.microsoft.com/office/drawing/2014/main" id="{0C569071-A5F8-E7C9-1DC2-DF3EA9F88597}"/>
+              <a:t>Задание 2. Градиентные профили (Фильтр </a:t>
+            </a:r>
+            <a:r>
+              <a:rPr lang="ru-RU" sz="2800" b="1" dirty="0" err="1">
+                <a:latin typeface="+mj-lt"/>
+              </a:rPr>
+              <a:t>Собеля</a:t>
+            </a:r>
+            <a:r>
+              <a:rPr lang="ru-RU" sz="2800" b="1" dirty="0">
+                <a:latin typeface="+mj-lt"/>
+              </a:rPr>
+              <a:t> по X и Y)</a:t>
+            </a:r>
+          </a:p>
+        </p:txBody>
+      </p:sp>
+      <p:sp>
+        <p:nvSpPr>
+          <p:cNvPr id="20" name="TextBox 19">
+            <a:extLst>
+              <a:ext uri="{FF2B5EF4-FFF2-40B4-BE49-F238E27FC236}">
+                <a16:creationId xmlns:a16="http://schemas.microsoft.com/office/drawing/2014/main" id="{71F5B869-FCA3-91D3-678D-F5E5BE3D9772}"/>
               </a:ext>
             </a:extLst>
           </p:cNvPr>
@@ -7433,8 +7597,8 @@
         </p:nvSpPr>
         <p:spPr>
           <a:xfrm>
-            <a:off x="3491513" y="4089955"/>
-            <a:ext cx="4173803" cy="369332"/>
+            <a:off x="1489608" y="1336088"/>
+            <a:ext cx="9212779" cy="707886"/>
           </a:xfrm>
           <a:prstGeom prst="rect">
             <a:avLst/>
@@ -7447,20 +7611,27 @@
           </a:bodyPr>
           <a:lstStyle/>
           <a:p>
-            <a:pPr algn="ctr"/>
-            <a:r>
-              <a:rPr lang="ru-RU" b="1" dirty="0"/>
-              <a:t>Код:</a:t>
-            </a:r>
-          </a:p>
-        </p:txBody>
-      </p:sp>
-      <p:sp>
-        <p:nvSpPr>
-          <p:cNvPr id="12" name="TextBox 11">
-            <a:extLst>
-              <a:ext uri="{FF2B5EF4-FFF2-40B4-BE49-F238E27FC236}">
-                <a16:creationId xmlns:a16="http://schemas.microsoft.com/office/drawing/2014/main" id="{5E081176-D1EE-00B4-D512-DF4558557F77}"/>
+            <a:r>
+              <a:rPr lang="ru-RU" sz="2000" dirty="0"/>
+              <a:t>Суть задания: Построить профили изображения после применения фильтра «</a:t>
+            </a:r>
+            <a:r>
+              <a:rPr lang="ru-RU" sz="2000" dirty="0" err="1"/>
+              <a:t>Собель</a:t>
+            </a:r>
+            <a:r>
+              <a:rPr lang="ru-RU" sz="2000" dirty="0"/>
+              <a:t>» по X и Y.</a:t>
+            </a:r>
+          </a:p>
+        </p:txBody>
+      </p:sp>
+      <p:sp>
+        <p:nvSpPr>
+          <p:cNvPr id="21" name="TextBox 20">
+            <a:extLst>
+              <a:ext uri="{FF2B5EF4-FFF2-40B4-BE49-F238E27FC236}">
+                <a16:creationId xmlns:a16="http://schemas.microsoft.com/office/drawing/2014/main" id="{0C569071-A5F8-E7C9-1DC2-DF3EA9F88597}"/>
               </a:ext>
             </a:extLst>
           </p:cNvPr>
@@ -7469,8 +7640,8 @@
         </p:nvSpPr>
         <p:spPr>
           <a:xfrm>
-            <a:off x="1489610" y="1747042"/>
-            <a:ext cx="9212779" cy="707886"/>
+            <a:off x="4009098" y="2045472"/>
+            <a:ext cx="4173803" cy="369332"/>
           </a:xfrm>
           <a:prstGeom prst="rect">
             <a:avLst/>
@@ -7483,9 +7654,10 @@
           </a:bodyPr>
           <a:lstStyle/>
           <a:p>
-            <a:r>
-              <a:rPr lang="ru-RU" sz="2000" dirty="0"/>
-              <a:t>Суть задания: Построить горизонтальную и вертикальную проекции цветного изображения (суммируя по каналам).</a:t>
+            <a:pPr algn="ctr"/>
+            <a:r>
+              <a:rPr lang="ru-RU" b="1" dirty="0"/>
+              <a:t>Код:</a:t>
             </a:r>
           </a:p>
         </p:txBody>
@@ -7495,7 +7667,7 @@
           <p:cNvPr id="14" name="Номер слайда 13">
             <a:extLst>
               <a:ext uri="{FF2B5EF4-FFF2-40B4-BE49-F238E27FC236}">
-                <a16:creationId xmlns:a16="http://schemas.microsoft.com/office/drawing/2014/main" id="{684D501B-E133-D9A8-6B7A-D563CF6B5219}"/>
+                <a16:creationId xmlns:a16="http://schemas.microsoft.com/office/drawing/2014/main" id="{E68AB01A-8F4E-E197-5EE4-ADA4BA8CC9A1}"/>
               </a:ext>
             </a:extLst>
           </p:cNvPr>
@@ -7524,7 +7696,7 @@
           <p:cNvPr id="4" name="Рисунок 3">
             <a:extLst>
               <a:ext uri="{FF2B5EF4-FFF2-40B4-BE49-F238E27FC236}">
-                <a16:creationId xmlns:a16="http://schemas.microsoft.com/office/drawing/2014/main" id="{9D5D7368-5656-7936-E8AB-C3EDD6992D22}"/>
+                <a16:creationId xmlns:a16="http://schemas.microsoft.com/office/drawing/2014/main" id="{02944396-69D4-932C-8309-DE4F20384B76}"/>
               </a:ext>
             </a:extLst>
           </p:cNvPr>
@@ -7541,8 +7713,38 @@
         </p:blipFill>
         <p:spPr>
           <a:xfrm>
-            <a:off x="7010400" y="2197100"/>
-            <a:ext cx="3657600" cy="4524375"/>
+            <a:off x="1379238" y="2613025"/>
+            <a:ext cx="4257675" cy="3743325"/>
+          </a:xfrm>
+          <a:prstGeom prst="rect">
+            <a:avLst/>
+          </a:prstGeom>
+        </p:spPr>
+      </p:pic>
+      <p:pic>
+        <p:nvPicPr>
+          <p:cNvPr id="7" name="Рисунок 6">
+            <a:extLst>
+              <a:ext uri="{FF2B5EF4-FFF2-40B4-BE49-F238E27FC236}">
+                <a16:creationId xmlns:a16="http://schemas.microsoft.com/office/drawing/2014/main" id="{1DDF10CE-5E4D-B6FE-824F-C2763B14AE11}"/>
+              </a:ext>
+            </a:extLst>
+          </p:cNvPr>
+          <p:cNvPicPr>
+            <a:picLocks noChangeAspect="1"/>
+          </p:cNvPicPr>
+          <p:nvPr/>
+        </p:nvPicPr>
+        <p:blipFill>
+          <a:blip r:embed="rId3"/>
+          <a:stretch>
+            <a:fillRect/>
+          </a:stretch>
+        </p:blipFill>
+        <p:spPr>
+          <a:xfrm>
+            <a:off x="5966693" y="2609487"/>
+            <a:ext cx="4295775" cy="3181350"/>
           </a:xfrm>
           <a:prstGeom prst="rect">
             <a:avLst/>
@@ -7552,7 +7754,7 @@
     </p:spTree>
     <p:extLst>
       <p:ext uri="{BB962C8B-B14F-4D97-AF65-F5344CB8AC3E}">
-        <p14:creationId xmlns:p14="http://schemas.microsoft.com/office/powerpoint/2010/main" val="3690317432"/>
+        <p14:creationId xmlns:p14="http://schemas.microsoft.com/office/powerpoint/2010/main" val="2412595500"/>
       </p:ext>
     </p:extLst>
   </p:cSld>
